--- a/论文图片/图片转pdf/第二章/几何阶段处理流程图.pptx
+++ b/论文图片/图片转pdf/第二章/几何阶段处理流程图.pptx
@@ -2930,271 +2930,242 @@
         <p:nvPr/>
       </p:nvGrpSpPr>
       <p:grpSpPr/>
-      <p:grpSp>
-        <p:nvGrpSpPr>
-          <p:cNvPr id="42" name="组合 41"/>
-          <p:cNvGrpSpPr/>
+      <p:sp>
+        <p:nvSpPr>
+          <p:cNvPr id="2" name="矩形 1"/>
+          <p:cNvSpPr/>
           <p:nvPr>
             <p:custDataLst>
               <p:tags r:id="rId1"/>
             </p:custDataLst>
           </p:nvPr>
-        </p:nvGrpSpPr>
-        <p:grpSpPr>
+        </p:nvSpPr>
+        <p:spPr>
           <a:xfrm>
-            <a:off x="28575" y="59055"/>
-            <a:ext cx="12534265" cy="3818890"/>
-            <a:chOff x="781" y="2008"/>
-            <a:chExt cx="17896" cy="5741"/>
+            <a:off x="28575" y="1153160"/>
+            <a:ext cx="12534265" cy="1762125"/>
           </a:xfrm>
-        </p:grpSpPr>
-        <p:sp>
-          <p:nvSpPr>
-            <p:cNvPr id="2" name="矩形 1"/>
-            <p:cNvSpPr/>
-            <p:nvPr>
-              <p:custDataLst>
-                <p:tags r:id="rId2"/>
-              </p:custDataLst>
-            </p:nvPr>
-          </p:nvSpPr>
-          <p:spPr>
-            <a:xfrm>
-              <a:off x="781" y="3653"/>
-              <a:ext cx="17896" cy="2649"/>
-            </a:xfrm>
-            <a:prstGeom prst="rect">
-              <a:avLst/>
-            </a:prstGeom>
+          <a:prstGeom prst="rect">
+            <a:avLst/>
+          </a:prstGeom>
+          <a:solidFill>
+            <a:srgbClr val="FBEDE0"/>
+          </a:solidFill>
+          <a:ln>
             <a:solidFill>
-              <a:srgbClr val="FBEDE0"/>
+              <a:schemeClr val="tx1"/>
             </a:solidFill>
-            <a:ln>
-              <a:solidFill>
-                <a:schemeClr val="tx1"/>
-              </a:solidFill>
-            </a:ln>
-          </p:spPr>
-          <p:style>
-            <a:lnRef idx="2">
-              <a:schemeClr val="accent1">
-                <a:lumMod val="75000"/>
-              </a:schemeClr>
-            </a:lnRef>
-            <a:fillRef idx="1">
-              <a:schemeClr val="accent1"/>
-            </a:fillRef>
-            <a:effectRef idx="0">
-              <a:srgbClr val="FFFFFF"/>
-            </a:effectRef>
-            <a:fontRef idx="minor">
-              <a:schemeClr val="lt1"/>
-            </a:fontRef>
-          </p:style>
-          <p:txBody>
-            <a:bodyPr rtlCol="0" anchor="ctr"/>
-            <a:p>
-              <a:pPr algn="ctr"/>
-              <a:endParaRPr lang="zh-CN" altLang="en-US" sz="1810"/>
-            </a:p>
-          </p:txBody>
-        </p:sp>
-        <p:sp>
-          <p:nvSpPr>
-            <p:cNvPr id="3" name="矩形 2"/>
-            <p:cNvSpPr/>
-            <p:nvPr>
-              <p:custDataLst>
-                <p:tags r:id="rId3"/>
-              </p:custDataLst>
-            </p:nvPr>
-          </p:nvSpPr>
-          <p:spPr>
-            <a:xfrm>
-              <a:off x="1078" y="2008"/>
-              <a:ext cx="1951" cy="692"/>
-            </a:xfrm>
-            <a:prstGeom prst="rect">
-              <a:avLst/>
-            </a:prstGeom>
+          </a:ln>
+        </p:spPr>
+        <p:style>
+          <a:lnRef idx="2">
+            <a:schemeClr val="accent1">
+              <a:lumMod val="75000"/>
+            </a:schemeClr>
+          </a:lnRef>
+          <a:fillRef idx="1">
+            <a:schemeClr val="accent1"/>
+          </a:fillRef>
+          <a:effectRef idx="0">
+            <a:srgbClr val="FFFFFF"/>
+          </a:effectRef>
+          <a:fontRef idx="minor">
+            <a:schemeClr val="lt1"/>
+          </a:fontRef>
+        </p:style>
+        <p:txBody>
+          <a:bodyPr rtlCol="0" anchor="ctr"/>
+          <a:p>
+            <a:pPr algn="ctr"/>
+            <a:endParaRPr lang="zh-CN" altLang="en-US" sz="1810"/>
+          </a:p>
+        </p:txBody>
+      </p:sp>
+      <p:sp>
+        <p:nvSpPr>
+          <p:cNvPr id="3" name="矩形 2"/>
+          <p:cNvSpPr/>
+          <p:nvPr>
+            <p:custDataLst>
+              <p:tags r:id="rId2"/>
+            </p:custDataLst>
+          </p:nvPr>
+        </p:nvSpPr>
+        <p:spPr>
+          <a:xfrm>
+            <a:off x="236855" y="59055"/>
+            <a:ext cx="1366520" cy="460375"/>
+          </a:xfrm>
+          <a:prstGeom prst="rect">
+            <a:avLst/>
+          </a:prstGeom>
+          <a:solidFill>
+            <a:srgbClr val="BBD6EB"/>
+          </a:solidFill>
+          <a:ln>
             <a:solidFill>
-              <a:srgbClr val="BBD6EB"/>
+              <a:schemeClr val="tx1"/>
             </a:solidFill>
-            <a:ln>
-              <a:solidFill>
-                <a:schemeClr val="tx1"/>
-              </a:solidFill>
-            </a:ln>
-          </p:spPr>
-          <p:style>
-            <a:lnRef idx="2">
-              <a:schemeClr val="accent1">
-                <a:lumMod val="75000"/>
-              </a:schemeClr>
-            </a:lnRef>
-            <a:fillRef idx="1">
-              <a:schemeClr val="accent1"/>
-            </a:fillRef>
-            <a:effectRef idx="0">
-              <a:srgbClr val="FFFFFF"/>
-            </a:effectRef>
-            <a:fontRef idx="minor">
-              <a:schemeClr val="lt1"/>
-            </a:fontRef>
-          </p:style>
-          <p:txBody>
-            <a:bodyPr rtlCol="0" anchor="ctr"/>
-            <a:p>
-              <a:pPr algn="ctr"/>
-              <a:r>
-                <a:rPr lang="zh-CN" altLang="en-US" sz="1810" b="1">
-                  <a:solidFill>
-                    <a:schemeClr val="tx1"/>
-                  </a:solidFill>
-                  <a:latin typeface="宋体" panose="02010600030101010101" pitchFamily="2" charset="-122"/>
-                  <a:ea typeface="宋体" panose="02010600030101010101" pitchFamily="2" charset="-122"/>
-                </a:rPr>
-                <a:t>应用阶段</a:t>
-              </a:r>
-              <a:endParaRPr lang="zh-CN" altLang="en-US" sz="1810" b="1">
+          </a:ln>
+        </p:spPr>
+        <p:style>
+          <a:lnRef idx="2">
+            <a:schemeClr val="accent1">
+              <a:lumMod val="75000"/>
+            </a:schemeClr>
+          </a:lnRef>
+          <a:fillRef idx="1">
+            <a:schemeClr val="accent1"/>
+          </a:fillRef>
+          <a:effectRef idx="0">
+            <a:srgbClr val="FFFFFF"/>
+          </a:effectRef>
+          <a:fontRef idx="minor">
+            <a:schemeClr val="lt1"/>
+          </a:fontRef>
+        </p:style>
+        <p:txBody>
+          <a:bodyPr rtlCol="0" anchor="ctr"/>
+          <a:p>
+            <a:pPr algn="ctr"/>
+            <a:r>
+              <a:rPr lang="zh-CN" altLang="en-US" sz="1810">
                 <a:solidFill>
                   <a:schemeClr val="tx1"/>
                 </a:solidFill>
                 <a:latin typeface="宋体" panose="02010600030101010101" pitchFamily="2" charset="-122"/>
                 <a:ea typeface="宋体" panose="02010600030101010101" pitchFamily="2" charset="-122"/>
-              </a:endParaRPr>
-            </a:p>
-          </p:txBody>
-        </p:sp>
-        <p:sp>
-          <p:nvSpPr>
-            <p:cNvPr id="6" name="矩形 5"/>
-            <p:cNvSpPr/>
-            <p:nvPr>
-              <p:custDataLst>
-                <p:tags r:id="rId4"/>
-              </p:custDataLst>
-            </p:nvPr>
-          </p:nvSpPr>
-          <p:spPr>
-            <a:xfrm>
-              <a:off x="1078" y="4542"/>
-              <a:ext cx="1951" cy="687"/>
-            </a:xfrm>
-            <a:prstGeom prst="rect">
-              <a:avLst/>
-            </a:prstGeom>
-            <a:solidFill>
-              <a:srgbClr val="F7CAAB"/>
-            </a:solidFill>
-            <a:ln>
+              </a:rPr>
+              <a:t>应用阶段</a:t>
+            </a:r>
+            <a:endParaRPr lang="zh-CN" altLang="en-US" sz="1810">
               <a:solidFill>
                 <a:schemeClr val="tx1"/>
               </a:solidFill>
-            </a:ln>
-          </p:spPr>
-          <p:style>
-            <a:lnRef idx="2">
-              <a:schemeClr val="accent1">
-                <a:lumMod val="75000"/>
-              </a:schemeClr>
-            </a:lnRef>
-            <a:fillRef idx="1">
-              <a:schemeClr val="accent1"/>
-            </a:fillRef>
-            <a:effectRef idx="0">
-              <a:srgbClr val="FFFFFF"/>
-            </a:effectRef>
-            <a:fontRef idx="minor">
-              <a:schemeClr val="lt1"/>
-            </a:fontRef>
-          </p:style>
-          <p:txBody>
-            <a:bodyPr rtlCol="0" anchor="ctr"/>
-            <a:p>
-              <a:pPr algn="ctr"/>
-              <a:r>
-                <a:rPr lang="zh-CN" altLang="en-US" sz="1810" b="1">
-                  <a:solidFill>
-                    <a:schemeClr val="tx1"/>
-                  </a:solidFill>
-                  <a:latin typeface="宋体" panose="02010600030101010101" pitchFamily="2" charset="-122"/>
-                  <a:ea typeface="宋体" panose="02010600030101010101" pitchFamily="2" charset="-122"/>
-                  <a:cs typeface="宋体" panose="02010600030101010101" pitchFamily="2" charset="-122"/>
-                </a:rPr>
-                <a:t>顶点着色器</a:t>
-              </a:r>
-              <a:endParaRPr lang="zh-CN" altLang="en-US" sz="1810" b="1">
+              <a:latin typeface="宋体" panose="02010600030101010101" pitchFamily="2" charset="-122"/>
+              <a:ea typeface="宋体" panose="02010600030101010101" pitchFamily="2" charset="-122"/>
+            </a:endParaRPr>
+          </a:p>
+        </p:txBody>
+      </p:sp>
+      <p:sp>
+        <p:nvSpPr>
+          <p:cNvPr id="6" name="矩形 5"/>
+          <p:cNvSpPr/>
+          <p:nvPr>
+            <p:custDataLst>
+              <p:tags r:id="rId3"/>
+            </p:custDataLst>
+          </p:nvPr>
+        </p:nvSpPr>
+        <p:spPr>
+          <a:xfrm>
+            <a:off x="236855" y="1744345"/>
+            <a:ext cx="1366520" cy="457200"/>
+          </a:xfrm>
+          <a:prstGeom prst="rect">
+            <a:avLst/>
+          </a:prstGeom>
+          <a:solidFill>
+            <a:srgbClr val="F7CAAB"/>
+          </a:solidFill>
+          <a:ln>
+            <a:solidFill>
+              <a:schemeClr val="tx1"/>
+            </a:solidFill>
+          </a:ln>
+        </p:spPr>
+        <p:style>
+          <a:lnRef idx="2">
+            <a:schemeClr val="accent1">
+              <a:lumMod val="75000"/>
+            </a:schemeClr>
+          </a:lnRef>
+          <a:fillRef idx="1">
+            <a:schemeClr val="accent1"/>
+          </a:fillRef>
+          <a:effectRef idx="0">
+            <a:srgbClr val="FFFFFF"/>
+          </a:effectRef>
+          <a:fontRef idx="minor">
+            <a:schemeClr val="lt1"/>
+          </a:fontRef>
+        </p:style>
+        <p:txBody>
+          <a:bodyPr rtlCol="0" anchor="ctr"/>
+          <a:p>
+            <a:pPr algn="ctr"/>
+            <a:r>
+              <a:rPr lang="zh-CN" altLang="en-US" sz="1810">
                 <a:solidFill>
                   <a:schemeClr val="tx1"/>
                 </a:solidFill>
                 <a:latin typeface="宋体" panose="02010600030101010101" pitchFamily="2" charset="-122"/>
                 <a:ea typeface="宋体" panose="02010600030101010101" pitchFamily="2" charset="-122"/>
                 <a:cs typeface="宋体" panose="02010600030101010101" pitchFamily="2" charset="-122"/>
-              </a:endParaRPr>
-            </a:p>
-          </p:txBody>
-        </p:sp>
-        <p:sp>
-          <p:nvSpPr>
-            <p:cNvPr id="7" name="矩形 6"/>
-            <p:cNvSpPr/>
-            <p:nvPr>
-              <p:custDataLst>
-                <p:tags r:id="rId5"/>
-              </p:custDataLst>
-            </p:nvPr>
-          </p:nvSpPr>
-          <p:spPr>
-            <a:xfrm>
-              <a:off x="16447" y="7057"/>
-              <a:ext cx="1951" cy="692"/>
-            </a:xfrm>
-            <a:prstGeom prst="rect">
-              <a:avLst/>
-            </a:prstGeom>
-            <a:solidFill>
-              <a:srgbClr val="C5DFB2"/>
-            </a:solidFill>
-            <a:ln>
+              </a:rPr>
+              <a:t>顶点着色器</a:t>
+            </a:r>
+            <a:endParaRPr lang="zh-CN" altLang="en-US" sz="1810">
               <a:solidFill>
                 <a:schemeClr val="tx1"/>
               </a:solidFill>
-            </a:ln>
-          </p:spPr>
-          <p:style>
-            <a:lnRef idx="2">
-              <a:schemeClr val="accent1">
-                <a:lumMod val="75000"/>
-              </a:schemeClr>
-            </a:lnRef>
-            <a:fillRef idx="1">
-              <a:schemeClr val="accent1"/>
-            </a:fillRef>
-            <a:effectRef idx="0">
-              <a:srgbClr val="FFFFFF"/>
-            </a:effectRef>
-            <a:fontRef idx="minor">
-              <a:schemeClr val="lt1"/>
-            </a:fontRef>
-          </p:style>
-          <p:txBody>
-            <a:bodyPr rtlCol="0" anchor="ctr"/>
-            <a:p>
-              <a:pPr algn="ctr"/>
-              <a:r>
-                <a:rPr lang="zh-CN" altLang="en-US" sz="1810" b="1">
-                  <a:solidFill>
-                    <a:schemeClr val="tx1"/>
-                  </a:solidFill>
-                  <a:latin typeface="Times New Roman" panose="02020603050405020304" charset="0"/>
-                  <a:ea typeface="宋体" panose="02010600030101010101" pitchFamily="2" charset="-122"/>
-                  <a:cs typeface="Times New Roman" panose="02020603050405020304" charset="0"/>
-                  <a:sym typeface="+mn-ea"/>
-                </a:rPr>
-                <a:t>光栅化阶段</a:t>
-              </a:r>
-              <a:endParaRPr lang="zh-CN" altLang="en-US" sz="1810" b="1">
+              <a:latin typeface="宋体" panose="02010600030101010101" pitchFamily="2" charset="-122"/>
+              <a:ea typeface="宋体" panose="02010600030101010101" pitchFamily="2" charset="-122"/>
+              <a:cs typeface="宋体" panose="02010600030101010101" pitchFamily="2" charset="-122"/>
+            </a:endParaRPr>
+          </a:p>
+        </p:txBody>
+      </p:sp>
+      <p:sp>
+        <p:nvSpPr>
+          <p:cNvPr id="7" name="矩形 6"/>
+          <p:cNvSpPr/>
+          <p:nvPr>
+            <p:custDataLst>
+              <p:tags r:id="rId4"/>
+            </p:custDataLst>
+          </p:nvPr>
+        </p:nvSpPr>
+        <p:spPr>
+          <a:xfrm>
+            <a:off x="11000740" y="3417570"/>
+            <a:ext cx="1366520" cy="460375"/>
+          </a:xfrm>
+          <a:prstGeom prst="rect">
+            <a:avLst/>
+          </a:prstGeom>
+          <a:solidFill>
+            <a:srgbClr val="C5DFB2"/>
+          </a:solidFill>
+          <a:ln>
+            <a:solidFill>
+              <a:schemeClr val="tx1"/>
+            </a:solidFill>
+          </a:ln>
+        </p:spPr>
+        <p:style>
+          <a:lnRef idx="2">
+            <a:schemeClr val="accent1">
+              <a:lumMod val="75000"/>
+            </a:schemeClr>
+          </a:lnRef>
+          <a:fillRef idx="1">
+            <a:schemeClr val="accent1"/>
+          </a:fillRef>
+          <a:effectRef idx="0">
+            <a:srgbClr val="FFFFFF"/>
+          </a:effectRef>
+          <a:fontRef idx="minor">
+            <a:schemeClr val="lt1"/>
+          </a:fontRef>
+        </p:style>
+        <p:txBody>
+          <a:bodyPr rtlCol="0" anchor="ctr"/>
+          <a:p>
+            <a:pPr algn="ctr"/>
+            <a:r>
+              <a:rPr lang="zh-CN" altLang="en-US" sz="1810">
                 <a:solidFill>
                   <a:schemeClr val="tx1"/>
                 </a:solidFill>
@@ -3202,1026 +3173,1036 @@
                 <a:ea typeface="宋体" panose="02010600030101010101" pitchFamily="2" charset="-122"/>
                 <a:cs typeface="Times New Roman" panose="02020603050405020304" charset="0"/>
                 <a:sym typeface="+mn-ea"/>
-              </a:endParaRPr>
-            </a:p>
-          </p:txBody>
-        </p:sp>
-        <p:sp>
-          <p:nvSpPr>
-            <p:cNvPr id="8" name="文本框 7"/>
-            <p:cNvSpPr txBox="1"/>
-            <p:nvPr>
-              <p:custDataLst>
-                <p:tags r:id="rId6"/>
-              </p:custDataLst>
-            </p:nvPr>
-          </p:nvSpPr>
-          <p:spPr>
-            <a:xfrm>
-              <a:off x="8574" y="3771"/>
-              <a:ext cx="1855" cy="556"/>
-            </a:xfrm>
-            <a:prstGeom prst="rect">
-              <a:avLst/>
-            </a:prstGeom>
-            <a:noFill/>
-          </p:spPr>
-          <p:txBody>
-            <a:bodyPr wrap="square" rtlCol="0">
-              <a:spAutoFit/>
-            </a:bodyPr>
-            <a:p>
-              <a:r>
-                <a:rPr lang="zh-CN" altLang="en-US" sz="1810" b="1">
-                  <a:solidFill>
-                    <a:schemeClr val="tx1"/>
-                  </a:solidFill>
-                  <a:latin typeface="宋体" panose="02010600030101010101" pitchFamily="2" charset="-122"/>
-                  <a:ea typeface="宋体" panose="02010600030101010101" pitchFamily="2" charset="-122"/>
-                  <a:sym typeface="+mn-ea"/>
-                </a:rPr>
-                <a:t>几何阶段</a:t>
-              </a:r>
-              <a:endParaRPr lang="zh-CN" altLang="en-US" sz="1810" b="1">
+              </a:rPr>
+              <a:t>光栅化阶段</a:t>
+            </a:r>
+            <a:endParaRPr lang="zh-CN" altLang="en-US" sz="1810">
+              <a:solidFill>
+                <a:schemeClr val="tx1"/>
+              </a:solidFill>
+              <a:latin typeface="Times New Roman" panose="02020603050405020304" charset="0"/>
+              <a:ea typeface="宋体" panose="02010600030101010101" pitchFamily="2" charset="-122"/>
+              <a:cs typeface="Times New Roman" panose="02020603050405020304" charset="0"/>
+              <a:sym typeface="+mn-ea"/>
+            </a:endParaRPr>
+          </a:p>
+        </p:txBody>
+      </p:sp>
+      <p:sp>
+        <p:nvSpPr>
+          <p:cNvPr id="8" name="文本框 7"/>
+          <p:cNvSpPr txBox="1"/>
+          <p:nvPr>
+            <p:custDataLst>
+              <p:tags r:id="rId5"/>
+            </p:custDataLst>
+          </p:nvPr>
+        </p:nvSpPr>
+        <p:spPr>
+          <a:xfrm>
+            <a:off x="5487035" y="1231900"/>
+            <a:ext cx="1299210" cy="369570"/>
+          </a:xfrm>
+          <a:prstGeom prst="rect">
+            <a:avLst/>
+          </a:prstGeom>
+          <a:noFill/>
+        </p:spPr>
+        <p:txBody>
+          <a:bodyPr wrap="square" rtlCol="0">
+            <a:spAutoFit/>
+          </a:bodyPr>
+          <a:p>
+            <a:r>
+              <a:rPr lang="zh-CN" altLang="en-US" sz="1810">
                 <a:solidFill>
                   <a:schemeClr val="tx1"/>
                 </a:solidFill>
                 <a:latin typeface="宋体" panose="02010600030101010101" pitchFamily="2" charset="-122"/>
                 <a:ea typeface="宋体" panose="02010600030101010101" pitchFamily="2" charset="-122"/>
                 <a:sym typeface="+mn-ea"/>
-              </a:endParaRPr>
-            </a:p>
-          </p:txBody>
-        </p:sp>
-        <p:sp>
-          <p:nvSpPr>
-            <p:cNvPr id="15" name="矩形 14"/>
-            <p:cNvSpPr/>
-            <p:nvPr>
-              <p:custDataLst>
-                <p:tags r:id="rId7"/>
-              </p:custDataLst>
-            </p:nvPr>
-          </p:nvSpPr>
-          <p:spPr>
-            <a:xfrm>
-              <a:off x="3724" y="4542"/>
-              <a:ext cx="5415" cy="687"/>
-            </a:xfrm>
-            <a:prstGeom prst="rect">
-              <a:avLst/>
-            </a:prstGeom>
-            <a:solidFill>
-              <a:srgbClr val="F7CAAB"/>
-            </a:solidFill>
-            <a:ln>
+              </a:rPr>
+              <a:t>几何阶段</a:t>
+            </a:r>
+            <a:endParaRPr lang="zh-CN" altLang="en-US" sz="1810">
               <a:solidFill>
                 <a:schemeClr val="tx1"/>
               </a:solidFill>
-              <a:prstDash val="solid"/>
-            </a:ln>
-          </p:spPr>
-          <p:style>
-            <a:lnRef idx="2">
-              <a:schemeClr val="accent1">
-                <a:lumMod val="75000"/>
-              </a:schemeClr>
-            </a:lnRef>
-            <a:fillRef idx="1">
-              <a:schemeClr val="accent1"/>
-            </a:fillRef>
-            <a:effectRef idx="0">
-              <a:srgbClr val="FFFFFF"/>
-            </a:effectRef>
-            <a:fontRef idx="minor">
-              <a:schemeClr val="lt1"/>
-            </a:fontRef>
-          </p:style>
-          <p:txBody>
-            <a:bodyPr rtlCol="0" anchor="ctr"/>
-            <a:p>
-              <a:pPr algn="ctr"/>
-              <a:r>
-                <a:rPr lang="zh-CN" altLang="en-US" sz="1810" b="1">
-                  <a:solidFill>
-                    <a:schemeClr val="tx1"/>
-                  </a:solidFill>
-                  <a:latin typeface="宋体" panose="02010600030101010101" pitchFamily="2" charset="-122"/>
-                  <a:ea typeface="宋体" panose="02010600030101010101" pitchFamily="2" charset="-122"/>
-                  <a:cs typeface="宋体" panose="02010600030101010101" pitchFamily="2" charset="-122"/>
-                </a:rPr>
-                <a:t>外壳着色器</a:t>
-              </a:r>
-              <a:r>
-                <a:rPr lang="en-US" altLang="zh-CN" sz="1810" b="1">
-                  <a:solidFill>
-                    <a:schemeClr val="tx1"/>
-                  </a:solidFill>
-                  <a:latin typeface="宋体" panose="02010600030101010101" pitchFamily="2" charset="-122"/>
-                  <a:ea typeface="宋体" panose="02010600030101010101" pitchFamily="2" charset="-122"/>
-                  <a:cs typeface="宋体" panose="02010600030101010101" pitchFamily="2" charset="-122"/>
-                </a:rPr>
-                <a:t>   </a:t>
-              </a:r>
-              <a:r>
-                <a:rPr lang="zh-CN" altLang="en-US" sz="1810" b="1">
-                  <a:solidFill>
-                    <a:schemeClr val="tx1"/>
-                  </a:solidFill>
-                  <a:latin typeface="宋体" panose="02010600030101010101" pitchFamily="2" charset="-122"/>
-                  <a:ea typeface="宋体" panose="02010600030101010101" pitchFamily="2" charset="-122"/>
-                  <a:cs typeface="宋体" panose="02010600030101010101" pitchFamily="2" charset="-122"/>
-                </a:rPr>
-                <a:t>细分器</a:t>
-              </a:r>
-              <a:r>
-                <a:rPr lang="en-US" altLang="zh-CN" sz="1810" b="1">
-                  <a:solidFill>
-                    <a:schemeClr val="tx1"/>
-                  </a:solidFill>
-                  <a:latin typeface="宋体" panose="02010600030101010101" pitchFamily="2" charset="-122"/>
-                  <a:ea typeface="宋体" panose="02010600030101010101" pitchFamily="2" charset="-122"/>
-                  <a:cs typeface="宋体" panose="02010600030101010101" pitchFamily="2" charset="-122"/>
-                </a:rPr>
-                <a:t>    </a:t>
-              </a:r>
-              <a:r>
-                <a:rPr lang="zh-CN" altLang="en-US" sz="1810" b="1">
-                  <a:solidFill>
-                    <a:schemeClr val="tx1"/>
-                  </a:solidFill>
-                  <a:latin typeface="宋体" panose="02010600030101010101" pitchFamily="2" charset="-122"/>
-                  <a:ea typeface="宋体" panose="02010600030101010101" pitchFamily="2" charset="-122"/>
-                  <a:cs typeface="宋体" panose="02010600030101010101" pitchFamily="2" charset="-122"/>
-                </a:rPr>
-                <a:t>域着色器</a:t>
-              </a:r>
-              <a:r>
-                <a:rPr lang="en-US" altLang="zh-CN" sz="1810" b="1">
-                  <a:solidFill>
-                    <a:schemeClr val="tx1"/>
-                  </a:solidFill>
-                  <a:latin typeface="宋体" panose="02010600030101010101" pitchFamily="2" charset="-122"/>
-                  <a:ea typeface="宋体" panose="02010600030101010101" pitchFamily="2" charset="-122"/>
-                  <a:cs typeface="宋体" panose="02010600030101010101" pitchFamily="2" charset="-122"/>
-                </a:rPr>
-                <a:t> </a:t>
-              </a:r>
-              <a:endParaRPr lang="en-US" altLang="zh-CN" sz="1810" b="1">
+              <a:latin typeface="宋体" panose="02010600030101010101" pitchFamily="2" charset="-122"/>
+              <a:ea typeface="宋体" panose="02010600030101010101" pitchFamily="2" charset="-122"/>
+              <a:sym typeface="+mn-ea"/>
+            </a:endParaRPr>
+          </a:p>
+        </p:txBody>
+      </p:sp>
+      <p:sp>
+        <p:nvSpPr>
+          <p:cNvPr id="15" name="矩形 14"/>
+          <p:cNvSpPr/>
+          <p:nvPr>
+            <p:custDataLst>
+              <p:tags r:id="rId6"/>
+            </p:custDataLst>
+          </p:nvPr>
+        </p:nvSpPr>
+        <p:spPr>
+          <a:xfrm>
+            <a:off x="2089785" y="1744345"/>
+            <a:ext cx="3792855" cy="457200"/>
+          </a:xfrm>
+          <a:prstGeom prst="rect">
+            <a:avLst/>
+          </a:prstGeom>
+          <a:solidFill>
+            <a:srgbClr val="F7CAAB"/>
+          </a:solidFill>
+          <a:ln>
+            <a:solidFill>
+              <a:schemeClr val="tx1"/>
+            </a:solidFill>
+            <a:prstDash val="solid"/>
+          </a:ln>
+        </p:spPr>
+        <p:style>
+          <a:lnRef idx="2">
+            <a:schemeClr val="accent1">
+              <a:lumMod val="75000"/>
+            </a:schemeClr>
+          </a:lnRef>
+          <a:fillRef idx="1">
+            <a:schemeClr val="accent1"/>
+          </a:fillRef>
+          <a:effectRef idx="0">
+            <a:srgbClr val="FFFFFF"/>
+          </a:effectRef>
+          <a:fontRef idx="minor">
+            <a:schemeClr val="lt1"/>
+          </a:fontRef>
+        </p:style>
+        <p:txBody>
+          <a:bodyPr rtlCol="0" anchor="ctr"/>
+          <a:p>
+            <a:pPr algn="ctr"/>
+            <a:r>
+              <a:rPr lang="zh-CN" altLang="en-US" sz="1810">
                 <a:solidFill>
                   <a:schemeClr val="tx1"/>
                 </a:solidFill>
                 <a:latin typeface="宋体" panose="02010600030101010101" pitchFamily="2" charset="-122"/>
                 <a:ea typeface="宋体" panose="02010600030101010101" pitchFamily="2" charset="-122"/>
                 <a:cs typeface="宋体" panose="02010600030101010101" pitchFamily="2" charset="-122"/>
-              </a:endParaRPr>
-            </a:p>
-          </p:txBody>
-        </p:sp>
-        <p:sp>
-          <p:nvSpPr>
-            <p:cNvPr id="16" name="矩形 15"/>
-            <p:cNvSpPr/>
-            <p:nvPr>
-              <p:custDataLst>
-                <p:tags r:id="rId8"/>
-              </p:custDataLst>
-            </p:nvPr>
-          </p:nvSpPr>
-          <p:spPr>
-            <a:xfrm>
-              <a:off x="9816" y="4542"/>
-              <a:ext cx="1951" cy="687"/>
-            </a:xfrm>
-            <a:prstGeom prst="rect">
-              <a:avLst/>
-            </a:prstGeom>
-            <a:solidFill>
-              <a:srgbClr val="F7CAAB"/>
-            </a:solidFill>
-            <a:ln>
-              <a:solidFill>
-                <a:schemeClr val="tx1"/>
-              </a:solidFill>
-            </a:ln>
-          </p:spPr>
-          <p:style>
-            <a:lnRef idx="2">
-              <a:schemeClr val="accent1">
-                <a:lumMod val="75000"/>
-              </a:schemeClr>
-            </a:lnRef>
-            <a:fillRef idx="1">
-              <a:schemeClr val="accent1"/>
-            </a:fillRef>
-            <a:effectRef idx="0">
-              <a:srgbClr val="FFFFFF"/>
-            </a:effectRef>
-            <a:fontRef idx="minor">
-              <a:schemeClr val="lt1"/>
-            </a:fontRef>
-          </p:style>
-          <p:txBody>
-            <a:bodyPr rtlCol="0" anchor="ctr"/>
-            <a:p>
-              <a:pPr algn="ctr"/>
-              <a:r>
-                <a:rPr lang="zh-CN" altLang="en-US" sz="1810" b="1">
-                  <a:solidFill>
-                    <a:schemeClr val="tx1"/>
-                  </a:solidFill>
-                  <a:latin typeface="宋体" panose="02010600030101010101" pitchFamily="2" charset="-122"/>
-                  <a:ea typeface="宋体" panose="02010600030101010101" pitchFamily="2" charset="-122"/>
-                  <a:cs typeface="宋体" panose="02010600030101010101" pitchFamily="2" charset="-122"/>
-                </a:rPr>
-                <a:t>几何着色器</a:t>
-              </a:r>
-              <a:endParaRPr lang="zh-CN" altLang="en-US" sz="1810" b="1">
+              </a:rPr>
+              <a:t>外壳着色器</a:t>
+            </a:r>
+            <a:r>
+              <a:rPr lang="en-US" altLang="zh-CN" sz="1810">
                 <a:solidFill>
                   <a:schemeClr val="tx1"/>
                 </a:solidFill>
                 <a:latin typeface="宋体" panose="02010600030101010101" pitchFamily="2" charset="-122"/>
                 <a:ea typeface="宋体" panose="02010600030101010101" pitchFamily="2" charset="-122"/>
                 <a:cs typeface="宋体" panose="02010600030101010101" pitchFamily="2" charset="-122"/>
-              </a:endParaRPr>
-            </a:p>
-          </p:txBody>
-        </p:sp>
-        <p:sp>
-          <p:nvSpPr>
-            <p:cNvPr id="17" name="矩形 16"/>
-            <p:cNvSpPr/>
-            <p:nvPr>
-              <p:custDataLst>
-                <p:tags r:id="rId9"/>
-              </p:custDataLst>
-            </p:nvPr>
-          </p:nvSpPr>
-          <p:spPr>
-            <a:xfrm>
-              <a:off x="12614" y="4542"/>
-              <a:ext cx="1140" cy="687"/>
-            </a:xfrm>
-            <a:prstGeom prst="rect">
-              <a:avLst/>
-            </a:prstGeom>
-            <a:solidFill>
-              <a:srgbClr val="F7CAAB"/>
-            </a:solidFill>
-            <a:ln>
-              <a:solidFill>
-                <a:schemeClr val="tx1"/>
-              </a:solidFill>
-            </a:ln>
-          </p:spPr>
-          <p:style>
-            <a:lnRef idx="2">
-              <a:schemeClr val="accent1">
-                <a:lumMod val="75000"/>
-              </a:schemeClr>
-            </a:lnRef>
-            <a:fillRef idx="1">
-              <a:schemeClr val="accent1"/>
-            </a:fillRef>
-            <a:effectRef idx="0">
-              <a:srgbClr val="FFFFFF"/>
-            </a:effectRef>
-            <a:fontRef idx="minor">
-              <a:schemeClr val="lt1"/>
-            </a:fontRef>
-          </p:style>
-          <p:txBody>
-            <a:bodyPr rtlCol="0" anchor="ctr"/>
-            <a:p>
-              <a:pPr algn="ctr"/>
-              <a:r>
-                <a:rPr lang="zh-CN" altLang="en-US" sz="1810" b="1">
-                  <a:solidFill>
-                    <a:schemeClr val="tx1"/>
-                  </a:solidFill>
-                  <a:latin typeface="宋体" panose="02010600030101010101" pitchFamily="2" charset="-122"/>
-                  <a:ea typeface="宋体" panose="02010600030101010101" pitchFamily="2" charset="-122"/>
-                  <a:cs typeface="宋体" panose="02010600030101010101" pitchFamily="2" charset="-122"/>
-                </a:rPr>
-                <a:t>投影</a:t>
-              </a:r>
-              <a:endParaRPr lang="zh-CN" altLang="en-US" sz="1810" b="1">
+              </a:rPr>
+              <a:t>   </a:t>
+            </a:r>
+            <a:r>
+              <a:rPr lang="zh-CN" altLang="en-US" sz="1810">
                 <a:solidFill>
                   <a:schemeClr val="tx1"/>
                 </a:solidFill>
                 <a:latin typeface="宋体" panose="02010600030101010101" pitchFamily="2" charset="-122"/>
                 <a:ea typeface="宋体" panose="02010600030101010101" pitchFamily="2" charset="-122"/>
                 <a:cs typeface="宋体" panose="02010600030101010101" pitchFamily="2" charset="-122"/>
-              </a:endParaRPr>
-            </a:p>
-          </p:txBody>
-        </p:sp>
-        <p:sp>
-          <p:nvSpPr>
-            <p:cNvPr id="20" name="矩形 19"/>
-            <p:cNvSpPr/>
-            <p:nvPr>
-              <p:custDataLst>
-                <p:tags r:id="rId10"/>
-              </p:custDataLst>
-            </p:nvPr>
-          </p:nvSpPr>
-          <p:spPr>
-            <a:xfrm>
-              <a:off x="14618" y="4542"/>
-              <a:ext cx="1140" cy="687"/>
-            </a:xfrm>
-            <a:prstGeom prst="rect">
-              <a:avLst/>
-            </a:prstGeom>
-            <a:solidFill>
-              <a:srgbClr val="F7CAAB"/>
-            </a:solidFill>
-            <a:ln>
-              <a:solidFill>
-                <a:schemeClr val="tx1"/>
-              </a:solidFill>
-            </a:ln>
-          </p:spPr>
-          <p:style>
-            <a:lnRef idx="2">
-              <a:schemeClr val="accent1">
-                <a:lumMod val="75000"/>
-              </a:schemeClr>
-            </a:lnRef>
-            <a:fillRef idx="1">
-              <a:schemeClr val="accent1"/>
-            </a:fillRef>
-            <a:effectRef idx="0">
-              <a:srgbClr val="FFFFFF"/>
-            </a:effectRef>
-            <a:fontRef idx="minor">
-              <a:schemeClr val="lt1"/>
-            </a:fontRef>
-          </p:style>
-          <p:txBody>
-            <a:bodyPr rtlCol="0" anchor="ctr"/>
-            <a:p>
-              <a:pPr algn="ctr"/>
-              <a:r>
-                <a:rPr lang="zh-CN" altLang="en-US" sz="1810" b="1">
-                  <a:solidFill>
-                    <a:schemeClr val="tx1"/>
-                  </a:solidFill>
-                  <a:latin typeface="宋体" panose="02010600030101010101" pitchFamily="2" charset="-122"/>
-                  <a:ea typeface="宋体" panose="02010600030101010101" pitchFamily="2" charset="-122"/>
-                  <a:cs typeface="宋体" panose="02010600030101010101" pitchFamily="2" charset="-122"/>
-                </a:rPr>
-                <a:t>裁剪</a:t>
-              </a:r>
-              <a:endParaRPr lang="zh-CN" altLang="en-US" sz="1810" b="1">
+              </a:rPr>
+              <a:t>细分器</a:t>
+            </a:r>
+            <a:r>
+              <a:rPr lang="en-US" altLang="zh-CN" sz="1810">
                 <a:solidFill>
                   <a:schemeClr val="tx1"/>
                 </a:solidFill>
                 <a:latin typeface="宋体" panose="02010600030101010101" pitchFamily="2" charset="-122"/>
                 <a:ea typeface="宋体" panose="02010600030101010101" pitchFamily="2" charset="-122"/>
                 <a:cs typeface="宋体" panose="02010600030101010101" pitchFamily="2" charset="-122"/>
-              </a:endParaRPr>
-            </a:p>
-          </p:txBody>
-        </p:sp>
-        <p:sp>
-          <p:nvSpPr>
-            <p:cNvPr id="22" name="矩形 21"/>
-            <p:cNvSpPr/>
-            <p:nvPr>
-              <p:custDataLst>
-                <p:tags r:id="rId11"/>
-              </p:custDataLst>
-            </p:nvPr>
-          </p:nvSpPr>
-          <p:spPr>
-            <a:xfrm>
-              <a:off x="16447" y="4528"/>
-              <a:ext cx="1945" cy="687"/>
-            </a:xfrm>
-            <a:prstGeom prst="rect">
-              <a:avLst/>
-            </a:prstGeom>
-            <a:solidFill>
-              <a:srgbClr val="F7CAAB"/>
-            </a:solidFill>
-            <a:ln>
-              <a:solidFill>
-                <a:schemeClr val="tx1"/>
-              </a:solidFill>
-            </a:ln>
-          </p:spPr>
-          <p:style>
-            <a:lnRef idx="2">
-              <a:schemeClr val="accent1">
-                <a:lumMod val="75000"/>
-              </a:schemeClr>
-            </a:lnRef>
-            <a:fillRef idx="1">
-              <a:schemeClr val="accent1"/>
-            </a:fillRef>
-            <a:effectRef idx="0">
-              <a:srgbClr val="FFFFFF"/>
-            </a:effectRef>
-            <a:fontRef idx="minor">
-              <a:schemeClr val="lt1"/>
-            </a:fontRef>
-          </p:style>
-          <p:txBody>
-            <a:bodyPr rtlCol="0" anchor="ctr"/>
-            <a:p>
-              <a:pPr algn="ctr"/>
-              <a:r>
-                <a:rPr lang="zh-CN" altLang="en-US" sz="1810" b="1">
-                  <a:solidFill>
-                    <a:schemeClr val="tx1"/>
-                  </a:solidFill>
-                  <a:latin typeface="宋体" panose="02010600030101010101" pitchFamily="2" charset="-122"/>
-                  <a:ea typeface="宋体" panose="02010600030101010101" pitchFamily="2" charset="-122"/>
-                  <a:cs typeface="宋体" panose="02010600030101010101" pitchFamily="2" charset="-122"/>
-                </a:rPr>
-                <a:t>屏幕映射</a:t>
-              </a:r>
-              <a:endParaRPr lang="zh-CN" altLang="en-US" sz="1810" b="1">
+              </a:rPr>
+              <a:t>    </a:t>
+            </a:r>
+            <a:r>
+              <a:rPr lang="zh-CN" altLang="en-US" sz="1810">
                 <a:solidFill>
                   <a:schemeClr val="tx1"/>
                 </a:solidFill>
                 <a:latin typeface="宋体" panose="02010600030101010101" pitchFamily="2" charset="-122"/>
                 <a:ea typeface="宋体" panose="02010600030101010101" pitchFamily="2" charset="-122"/>
                 <a:cs typeface="宋体" panose="02010600030101010101" pitchFamily="2" charset="-122"/>
-              </a:endParaRPr>
-            </a:p>
-          </p:txBody>
-        </p:sp>
-        <p:cxnSp>
-          <p:nvCxnSpPr>
-            <p:cNvPr id="23" name="直接箭头连接符 22"/>
-            <p:cNvCxnSpPr>
-              <a:stCxn id="6" idx="3"/>
-              <a:endCxn id="15" idx="1"/>
-            </p:cNvCxnSpPr>
-            <p:nvPr>
-              <p:custDataLst>
-                <p:tags r:id="rId12"/>
-              </p:custDataLst>
-            </p:nvPr>
-          </p:nvCxnSpPr>
-          <p:spPr>
-            <a:xfrm>
-              <a:off x="3029" y="4886"/>
-              <a:ext cx="695" cy="0"/>
-            </a:xfrm>
-            <a:prstGeom prst="straightConnector1">
-              <a:avLst/>
-            </a:prstGeom>
-            <a:ln w="19050">
+              </a:rPr>
+              <a:t>域着色器</a:t>
+            </a:r>
+            <a:r>
+              <a:rPr lang="en-US" altLang="zh-CN" sz="1810">
+                <a:solidFill>
+                  <a:schemeClr val="tx1"/>
+                </a:solidFill>
+                <a:latin typeface="宋体" panose="02010600030101010101" pitchFamily="2" charset="-122"/>
+                <a:ea typeface="宋体" panose="02010600030101010101" pitchFamily="2" charset="-122"/>
+                <a:cs typeface="宋体" panose="02010600030101010101" pitchFamily="2" charset="-122"/>
+              </a:rPr>
+              <a:t> </a:t>
+            </a:r>
+            <a:endParaRPr lang="en-US" altLang="zh-CN" sz="1810">
               <a:solidFill>
                 <a:schemeClr val="tx1"/>
               </a:solidFill>
-              <a:headEnd type="none"/>
-              <a:tailEnd type="triangle" w="med" len="med"/>
-            </a:ln>
-          </p:spPr>
-          <p:style>
-            <a:lnRef idx="2">
-              <a:schemeClr val="accent1"/>
-            </a:lnRef>
-            <a:fillRef idx="0">
-              <a:srgbClr val="FFFFFF"/>
-            </a:fillRef>
-            <a:effectRef idx="0">
-              <a:srgbClr val="FFFFFF"/>
-            </a:effectRef>
-            <a:fontRef idx="minor">
+              <a:latin typeface="宋体" panose="02010600030101010101" pitchFamily="2" charset="-122"/>
+              <a:ea typeface="宋体" panose="02010600030101010101" pitchFamily="2" charset="-122"/>
+              <a:cs typeface="宋体" panose="02010600030101010101" pitchFamily="2" charset="-122"/>
+            </a:endParaRPr>
+          </a:p>
+        </p:txBody>
+      </p:sp>
+      <p:sp>
+        <p:nvSpPr>
+          <p:cNvPr id="16" name="矩形 15"/>
+          <p:cNvSpPr/>
+          <p:nvPr>
+            <p:custDataLst>
+              <p:tags r:id="rId7"/>
+            </p:custDataLst>
+          </p:nvPr>
+        </p:nvSpPr>
+        <p:spPr>
+          <a:xfrm>
+            <a:off x="6356350" y="1744345"/>
+            <a:ext cx="1366520" cy="457200"/>
+          </a:xfrm>
+          <a:prstGeom prst="rect">
+            <a:avLst/>
+          </a:prstGeom>
+          <a:solidFill>
+            <a:srgbClr val="F7CAAB"/>
+          </a:solidFill>
+          <a:ln>
+            <a:solidFill>
               <a:schemeClr val="tx1"/>
-            </a:fontRef>
-          </p:style>
-        </p:cxnSp>
-        <p:cxnSp>
-          <p:nvCxnSpPr>
-            <p:cNvPr id="24" name="直接箭头连接符 23"/>
-            <p:cNvCxnSpPr/>
-            <p:nvPr>
-              <p:custDataLst>
-                <p:tags r:id="rId13"/>
-              </p:custDataLst>
-            </p:nvPr>
-          </p:nvCxnSpPr>
-          <p:spPr>
-            <a:xfrm>
-              <a:off x="9139" y="4886"/>
-              <a:ext cx="695" cy="0"/>
-            </a:xfrm>
-            <a:prstGeom prst="straightConnector1">
-              <a:avLst/>
-            </a:prstGeom>
-            <a:ln w="19050">
+            </a:solidFill>
+          </a:ln>
+        </p:spPr>
+        <p:style>
+          <a:lnRef idx="2">
+            <a:schemeClr val="accent1">
+              <a:lumMod val="75000"/>
+            </a:schemeClr>
+          </a:lnRef>
+          <a:fillRef idx="1">
+            <a:schemeClr val="accent1"/>
+          </a:fillRef>
+          <a:effectRef idx="0">
+            <a:srgbClr val="FFFFFF"/>
+          </a:effectRef>
+          <a:fontRef idx="minor">
+            <a:schemeClr val="lt1"/>
+          </a:fontRef>
+        </p:style>
+        <p:txBody>
+          <a:bodyPr rtlCol="0" anchor="ctr"/>
+          <a:p>
+            <a:pPr algn="ctr"/>
+            <a:r>
+              <a:rPr lang="zh-CN" altLang="en-US" sz="1810">
+                <a:solidFill>
+                  <a:schemeClr val="tx1"/>
+                </a:solidFill>
+                <a:latin typeface="宋体" panose="02010600030101010101" pitchFamily="2" charset="-122"/>
+                <a:ea typeface="宋体" panose="02010600030101010101" pitchFamily="2" charset="-122"/>
+                <a:cs typeface="宋体" panose="02010600030101010101" pitchFamily="2" charset="-122"/>
+              </a:rPr>
+              <a:t>几何着色器</a:t>
+            </a:r>
+            <a:endParaRPr lang="zh-CN" altLang="en-US" sz="1810">
               <a:solidFill>
                 <a:schemeClr val="tx1"/>
               </a:solidFill>
-              <a:headEnd type="none"/>
-              <a:tailEnd type="triangle" w="med" len="med"/>
-            </a:ln>
-          </p:spPr>
-          <p:style>
-            <a:lnRef idx="2">
-              <a:schemeClr val="accent1"/>
-            </a:lnRef>
-            <a:fillRef idx="0">
-              <a:srgbClr val="FFFFFF"/>
-            </a:fillRef>
-            <a:effectRef idx="0">
-              <a:srgbClr val="FFFFFF"/>
-            </a:effectRef>
-            <a:fontRef idx="minor">
+              <a:latin typeface="宋体" panose="02010600030101010101" pitchFamily="2" charset="-122"/>
+              <a:ea typeface="宋体" panose="02010600030101010101" pitchFamily="2" charset="-122"/>
+              <a:cs typeface="宋体" panose="02010600030101010101" pitchFamily="2" charset="-122"/>
+            </a:endParaRPr>
+          </a:p>
+        </p:txBody>
+      </p:sp>
+      <p:sp>
+        <p:nvSpPr>
+          <p:cNvPr id="17" name="矩形 16"/>
+          <p:cNvSpPr/>
+          <p:nvPr>
+            <p:custDataLst>
+              <p:tags r:id="rId8"/>
+            </p:custDataLst>
+          </p:nvPr>
+        </p:nvSpPr>
+        <p:spPr>
+          <a:xfrm>
+            <a:off x="8316595" y="1744345"/>
+            <a:ext cx="798195" cy="457200"/>
+          </a:xfrm>
+          <a:prstGeom prst="rect">
+            <a:avLst/>
+          </a:prstGeom>
+          <a:solidFill>
+            <a:srgbClr val="F7CAAB"/>
+          </a:solidFill>
+          <a:ln>
+            <a:solidFill>
               <a:schemeClr val="tx1"/>
-            </a:fontRef>
-          </p:style>
-        </p:cxnSp>
-        <p:cxnSp>
-          <p:nvCxnSpPr>
-            <p:cNvPr id="25" name="直接箭头连接符 24"/>
-            <p:cNvCxnSpPr>
-              <a:stCxn id="16" idx="3"/>
-            </p:cNvCxnSpPr>
-            <p:nvPr>
-              <p:custDataLst>
-                <p:tags r:id="rId14"/>
-              </p:custDataLst>
-            </p:nvPr>
-          </p:nvCxnSpPr>
-          <p:spPr>
-            <a:xfrm>
-              <a:off x="11767" y="4886"/>
-              <a:ext cx="864" cy="0"/>
-            </a:xfrm>
-            <a:prstGeom prst="straightConnector1">
-              <a:avLst/>
-            </a:prstGeom>
-            <a:ln w="19050">
+            </a:solidFill>
+          </a:ln>
+        </p:spPr>
+        <p:style>
+          <a:lnRef idx="2">
+            <a:schemeClr val="accent1">
+              <a:lumMod val="75000"/>
+            </a:schemeClr>
+          </a:lnRef>
+          <a:fillRef idx="1">
+            <a:schemeClr val="accent1"/>
+          </a:fillRef>
+          <a:effectRef idx="0">
+            <a:srgbClr val="FFFFFF"/>
+          </a:effectRef>
+          <a:fontRef idx="minor">
+            <a:schemeClr val="lt1"/>
+          </a:fontRef>
+        </p:style>
+        <p:txBody>
+          <a:bodyPr rtlCol="0" anchor="ctr"/>
+          <a:p>
+            <a:pPr algn="ctr"/>
+            <a:r>
+              <a:rPr lang="zh-CN" altLang="en-US" sz="1810">
+                <a:solidFill>
+                  <a:schemeClr val="tx1"/>
+                </a:solidFill>
+                <a:latin typeface="宋体" panose="02010600030101010101" pitchFamily="2" charset="-122"/>
+                <a:ea typeface="宋体" panose="02010600030101010101" pitchFamily="2" charset="-122"/>
+                <a:cs typeface="宋体" panose="02010600030101010101" pitchFamily="2" charset="-122"/>
+              </a:rPr>
+              <a:t>投影</a:t>
+            </a:r>
+            <a:endParaRPr lang="zh-CN" altLang="en-US" sz="1810">
               <a:solidFill>
                 <a:schemeClr val="tx1"/>
               </a:solidFill>
-              <a:headEnd type="none"/>
-              <a:tailEnd type="triangle" w="med" len="med"/>
-            </a:ln>
-          </p:spPr>
-          <p:style>
-            <a:lnRef idx="2">
-              <a:schemeClr val="accent1"/>
-            </a:lnRef>
-            <a:fillRef idx="0">
-              <a:srgbClr val="FFFFFF"/>
-            </a:fillRef>
-            <a:effectRef idx="0">
-              <a:srgbClr val="FFFFFF"/>
-            </a:effectRef>
-            <a:fontRef idx="minor">
+              <a:latin typeface="宋体" panose="02010600030101010101" pitchFamily="2" charset="-122"/>
+              <a:ea typeface="宋体" panose="02010600030101010101" pitchFamily="2" charset="-122"/>
+              <a:cs typeface="宋体" panose="02010600030101010101" pitchFamily="2" charset="-122"/>
+            </a:endParaRPr>
+          </a:p>
+        </p:txBody>
+      </p:sp>
+      <p:sp>
+        <p:nvSpPr>
+          <p:cNvPr id="20" name="矩形 19"/>
+          <p:cNvSpPr/>
+          <p:nvPr>
+            <p:custDataLst>
+              <p:tags r:id="rId9"/>
+            </p:custDataLst>
+          </p:nvPr>
+        </p:nvSpPr>
+        <p:spPr>
+          <a:xfrm>
+            <a:off x="9719945" y="1744345"/>
+            <a:ext cx="798195" cy="457200"/>
+          </a:xfrm>
+          <a:prstGeom prst="rect">
+            <a:avLst/>
+          </a:prstGeom>
+          <a:solidFill>
+            <a:srgbClr val="F7CAAB"/>
+          </a:solidFill>
+          <a:ln>
+            <a:solidFill>
               <a:schemeClr val="tx1"/>
-            </a:fontRef>
-          </p:style>
-        </p:cxnSp>
-        <p:cxnSp>
-          <p:nvCxnSpPr>
-            <p:cNvPr id="26" name="直接箭头连接符 25"/>
-            <p:cNvCxnSpPr/>
-            <p:nvPr>
-              <p:custDataLst>
-                <p:tags r:id="rId15"/>
-              </p:custDataLst>
-            </p:nvPr>
-          </p:nvCxnSpPr>
-          <p:spPr>
-            <a:xfrm>
-              <a:off x="13754" y="4886"/>
-              <a:ext cx="864" cy="0"/>
-            </a:xfrm>
-            <a:prstGeom prst="straightConnector1">
-              <a:avLst/>
-            </a:prstGeom>
-            <a:ln w="19050">
+            </a:solidFill>
+          </a:ln>
+        </p:spPr>
+        <p:style>
+          <a:lnRef idx="2">
+            <a:schemeClr val="accent1">
+              <a:lumMod val="75000"/>
+            </a:schemeClr>
+          </a:lnRef>
+          <a:fillRef idx="1">
+            <a:schemeClr val="accent1"/>
+          </a:fillRef>
+          <a:effectRef idx="0">
+            <a:srgbClr val="FFFFFF"/>
+          </a:effectRef>
+          <a:fontRef idx="minor">
+            <a:schemeClr val="lt1"/>
+          </a:fontRef>
+        </p:style>
+        <p:txBody>
+          <a:bodyPr rtlCol="0" anchor="ctr"/>
+          <a:p>
+            <a:pPr algn="ctr"/>
+            <a:r>
+              <a:rPr lang="zh-CN" altLang="en-US" sz="1810">
+                <a:solidFill>
+                  <a:schemeClr val="tx1"/>
+                </a:solidFill>
+                <a:latin typeface="宋体" panose="02010600030101010101" pitchFamily="2" charset="-122"/>
+                <a:ea typeface="宋体" panose="02010600030101010101" pitchFamily="2" charset="-122"/>
+                <a:cs typeface="宋体" panose="02010600030101010101" pitchFamily="2" charset="-122"/>
+              </a:rPr>
+              <a:t>裁剪</a:t>
+            </a:r>
+            <a:endParaRPr lang="zh-CN" altLang="en-US" sz="1810">
               <a:solidFill>
                 <a:schemeClr val="tx1"/>
               </a:solidFill>
-              <a:headEnd type="none"/>
-              <a:tailEnd type="triangle" w="med" len="med"/>
-            </a:ln>
-          </p:spPr>
-          <p:style>
-            <a:lnRef idx="2">
-              <a:schemeClr val="accent1"/>
-            </a:lnRef>
-            <a:fillRef idx="0">
-              <a:srgbClr val="FFFFFF"/>
-            </a:fillRef>
-            <a:effectRef idx="0">
-              <a:srgbClr val="FFFFFF"/>
-            </a:effectRef>
-            <a:fontRef idx="minor">
+              <a:latin typeface="宋体" panose="02010600030101010101" pitchFamily="2" charset="-122"/>
+              <a:ea typeface="宋体" panose="02010600030101010101" pitchFamily="2" charset="-122"/>
+              <a:cs typeface="宋体" panose="02010600030101010101" pitchFamily="2" charset="-122"/>
+            </a:endParaRPr>
+          </a:p>
+        </p:txBody>
+      </p:sp>
+      <p:sp>
+        <p:nvSpPr>
+          <p:cNvPr id="22" name="矩形 21"/>
+          <p:cNvSpPr/>
+          <p:nvPr>
+            <p:custDataLst>
+              <p:tags r:id="rId10"/>
+            </p:custDataLst>
+          </p:nvPr>
+        </p:nvSpPr>
+        <p:spPr>
+          <a:xfrm>
+            <a:off x="11000740" y="1735455"/>
+            <a:ext cx="1362075" cy="457200"/>
+          </a:xfrm>
+          <a:prstGeom prst="rect">
+            <a:avLst/>
+          </a:prstGeom>
+          <a:solidFill>
+            <a:srgbClr val="F7CAAB"/>
+          </a:solidFill>
+          <a:ln>
+            <a:solidFill>
               <a:schemeClr val="tx1"/>
-            </a:fontRef>
-          </p:style>
-        </p:cxnSp>
-        <p:cxnSp>
-          <p:nvCxnSpPr>
-            <p:cNvPr id="28" name="直接箭头连接符 27"/>
-            <p:cNvCxnSpPr/>
-            <p:nvPr>
-              <p:custDataLst>
-                <p:tags r:id="rId16"/>
-              </p:custDataLst>
-            </p:nvPr>
-          </p:nvCxnSpPr>
-          <p:spPr>
-            <a:xfrm>
-              <a:off x="15758" y="4886"/>
-              <a:ext cx="689" cy="11"/>
-            </a:xfrm>
-            <a:prstGeom prst="straightConnector1">
-              <a:avLst/>
-            </a:prstGeom>
-            <a:ln w="19050">
+            </a:solidFill>
+          </a:ln>
+        </p:spPr>
+        <p:style>
+          <a:lnRef idx="2">
+            <a:schemeClr val="accent1">
+              <a:lumMod val="75000"/>
+            </a:schemeClr>
+          </a:lnRef>
+          <a:fillRef idx="1">
+            <a:schemeClr val="accent1"/>
+          </a:fillRef>
+          <a:effectRef idx="0">
+            <a:srgbClr val="FFFFFF"/>
+          </a:effectRef>
+          <a:fontRef idx="minor">
+            <a:schemeClr val="lt1"/>
+          </a:fontRef>
+        </p:style>
+        <p:txBody>
+          <a:bodyPr rtlCol="0" anchor="ctr"/>
+          <a:p>
+            <a:pPr algn="ctr"/>
+            <a:r>
+              <a:rPr lang="zh-CN" altLang="en-US" sz="1810">
+                <a:solidFill>
+                  <a:schemeClr val="tx1"/>
+                </a:solidFill>
+                <a:latin typeface="宋体" panose="02010600030101010101" pitchFamily="2" charset="-122"/>
+                <a:ea typeface="宋体" panose="02010600030101010101" pitchFamily="2" charset="-122"/>
+                <a:cs typeface="宋体" panose="02010600030101010101" pitchFamily="2" charset="-122"/>
+              </a:rPr>
+              <a:t>屏幕映射</a:t>
+            </a:r>
+            <a:endParaRPr lang="zh-CN" altLang="en-US" sz="1810">
               <a:solidFill>
                 <a:schemeClr val="tx1"/>
               </a:solidFill>
-              <a:headEnd type="none"/>
-              <a:tailEnd type="triangle" w="med" len="med"/>
-            </a:ln>
-          </p:spPr>
-          <p:style>
-            <a:lnRef idx="2">
-              <a:schemeClr val="accent1"/>
-            </a:lnRef>
-            <a:fillRef idx="0">
-              <a:srgbClr val="FFFFFF"/>
-            </a:fillRef>
-            <a:effectRef idx="0">
-              <a:srgbClr val="FFFFFF"/>
-            </a:effectRef>
-            <a:fontRef idx="minor">
+              <a:latin typeface="宋体" panose="02010600030101010101" pitchFamily="2" charset="-122"/>
+              <a:ea typeface="宋体" panose="02010600030101010101" pitchFamily="2" charset="-122"/>
+              <a:cs typeface="宋体" panose="02010600030101010101" pitchFamily="2" charset="-122"/>
+            </a:endParaRPr>
+          </a:p>
+        </p:txBody>
+      </p:sp>
+      <p:cxnSp>
+        <p:nvCxnSpPr>
+          <p:cNvPr id="23" name="直接箭头连接符 22"/>
+          <p:cNvCxnSpPr>
+            <a:stCxn id="6" idx="3"/>
+            <a:endCxn id="15" idx="1"/>
+          </p:cNvCxnSpPr>
+          <p:nvPr>
+            <p:custDataLst>
+              <p:tags r:id="rId11"/>
+            </p:custDataLst>
+          </p:nvPr>
+        </p:nvCxnSpPr>
+        <p:spPr>
+          <a:xfrm>
+            <a:off x="1603375" y="1973580"/>
+            <a:ext cx="487045" cy="0"/>
+          </a:xfrm>
+          <a:prstGeom prst="straightConnector1">
+            <a:avLst/>
+          </a:prstGeom>
+          <a:ln w="19050">
+            <a:solidFill>
               <a:schemeClr val="tx1"/>
-            </a:fontRef>
-          </p:style>
-        </p:cxnSp>
-        <p:cxnSp>
-          <p:nvCxnSpPr>
-            <p:cNvPr id="30" name="直接箭头连接符 29"/>
-            <p:cNvCxnSpPr>
-              <a:stCxn id="3" idx="2"/>
-              <a:endCxn id="6" idx="0"/>
-            </p:cNvCxnSpPr>
-            <p:nvPr>
-              <p:custDataLst>
-                <p:tags r:id="rId17"/>
-              </p:custDataLst>
-            </p:nvPr>
-          </p:nvCxnSpPr>
-          <p:spPr>
-            <a:xfrm>
-              <a:off x="2054" y="2700"/>
-              <a:ext cx="0" cy="1842"/>
-            </a:xfrm>
-            <a:prstGeom prst="straightConnector1">
-              <a:avLst/>
-            </a:prstGeom>
-            <a:ln w="19050">
-              <a:solidFill>
-                <a:schemeClr val="tx1"/>
-              </a:solidFill>
-              <a:headEnd type="none"/>
-              <a:tailEnd type="triangle" w="med" len="med"/>
-            </a:ln>
-          </p:spPr>
-          <p:style>
-            <a:lnRef idx="2">
-              <a:schemeClr val="accent1"/>
-            </a:lnRef>
-            <a:fillRef idx="0">
-              <a:srgbClr val="FFFFFF"/>
-            </a:fillRef>
-            <a:effectRef idx="0">
-              <a:srgbClr val="FFFFFF"/>
-            </a:effectRef>
-            <a:fontRef idx="minor">
+            </a:solidFill>
+            <a:headEnd type="none"/>
+            <a:tailEnd type="triangle" w="med" len="med"/>
+          </a:ln>
+        </p:spPr>
+        <p:style>
+          <a:lnRef idx="2">
+            <a:schemeClr val="accent1"/>
+          </a:lnRef>
+          <a:fillRef idx="0">
+            <a:srgbClr val="FFFFFF"/>
+          </a:fillRef>
+          <a:effectRef idx="0">
+            <a:srgbClr val="FFFFFF"/>
+          </a:effectRef>
+          <a:fontRef idx="minor">
+            <a:schemeClr val="tx1"/>
+          </a:fontRef>
+        </p:style>
+      </p:cxnSp>
+      <p:cxnSp>
+        <p:nvCxnSpPr>
+          <p:cNvPr id="24" name="直接箭头连接符 23"/>
+          <p:cNvCxnSpPr/>
+          <p:nvPr>
+            <p:custDataLst>
+              <p:tags r:id="rId12"/>
+            </p:custDataLst>
+          </p:nvPr>
+        </p:nvCxnSpPr>
+        <p:spPr>
+          <a:xfrm>
+            <a:off x="5882640" y="1973580"/>
+            <a:ext cx="487045" cy="0"/>
+          </a:xfrm>
+          <a:prstGeom prst="straightConnector1">
+            <a:avLst/>
+          </a:prstGeom>
+          <a:ln w="19050">
+            <a:solidFill>
               <a:schemeClr val="tx1"/>
-            </a:fontRef>
-          </p:style>
-        </p:cxnSp>
-        <p:cxnSp>
-          <p:nvCxnSpPr>
-            <p:cNvPr id="34" name="直接箭头连接符 33"/>
-            <p:cNvCxnSpPr/>
-            <p:nvPr>
-              <p:custDataLst>
-                <p:tags r:id="rId18"/>
-              </p:custDataLst>
-            </p:nvPr>
-          </p:nvCxnSpPr>
-          <p:spPr>
-            <a:xfrm>
-              <a:off x="17423" y="5215"/>
-              <a:ext cx="0" cy="1842"/>
-            </a:xfrm>
-            <a:prstGeom prst="straightConnector1">
-              <a:avLst/>
-            </a:prstGeom>
-            <a:ln w="19050">
-              <a:solidFill>
-                <a:schemeClr val="tx1"/>
-              </a:solidFill>
-              <a:headEnd type="none"/>
-              <a:tailEnd type="triangle" w="med" len="med"/>
-            </a:ln>
-          </p:spPr>
-          <p:style>
-            <a:lnRef idx="2">
-              <a:schemeClr val="accent1"/>
-            </a:lnRef>
-            <a:fillRef idx="0">
-              <a:srgbClr val="FFFFFF"/>
-            </a:fillRef>
-            <a:effectRef idx="0">
-              <a:srgbClr val="FFFFFF"/>
-            </a:effectRef>
-            <a:fontRef idx="minor">
+            </a:solidFill>
+            <a:headEnd type="none"/>
+            <a:tailEnd type="triangle" w="med" len="med"/>
+          </a:ln>
+        </p:spPr>
+        <p:style>
+          <a:lnRef idx="2">
+            <a:schemeClr val="accent1"/>
+          </a:lnRef>
+          <a:fillRef idx="0">
+            <a:srgbClr val="FFFFFF"/>
+          </a:fillRef>
+          <a:effectRef idx="0">
+            <a:srgbClr val="FFFFFF"/>
+          </a:effectRef>
+          <a:fontRef idx="minor">
+            <a:schemeClr val="tx1"/>
+          </a:fontRef>
+        </p:style>
+      </p:cxnSp>
+      <p:cxnSp>
+        <p:nvCxnSpPr>
+          <p:cNvPr id="25" name="直接箭头连接符 24"/>
+          <p:cNvCxnSpPr>
+            <a:stCxn id="16" idx="3"/>
+          </p:cNvCxnSpPr>
+          <p:nvPr>
+            <p:custDataLst>
+              <p:tags r:id="rId13"/>
+            </p:custDataLst>
+          </p:nvPr>
+        </p:nvCxnSpPr>
+        <p:spPr>
+          <a:xfrm>
+            <a:off x="7722870" y="1973580"/>
+            <a:ext cx="605155" cy="0"/>
+          </a:xfrm>
+          <a:prstGeom prst="straightConnector1">
+            <a:avLst/>
+          </a:prstGeom>
+          <a:ln w="19050">
+            <a:solidFill>
               <a:schemeClr val="tx1"/>
-            </a:fontRef>
-          </p:style>
-        </p:cxnSp>
-        <p:sp>
-          <p:nvSpPr>
-            <p:cNvPr id="37" name="矩形 36"/>
-            <p:cNvSpPr/>
-            <p:nvPr>
-              <p:custDataLst>
-                <p:tags r:id="rId19"/>
-              </p:custDataLst>
-            </p:nvPr>
-          </p:nvSpPr>
-          <p:spPr>
-            <a:xfrm>
-              <a:off x="909" y="4359"/>
-              <a:ext cx="11321" cy="1627"/>
-            </a:xfrm>
-            <a:prstGeom prst="rect">
-              <a:avLst/>
-            </a:prstGeom>
-            <a:ln w="12700" cap="flat" cmpd="sng" algn="ctr">
-              <a:solidFill>
-                <a:schemeClr val="tx1"/>
-              </a:solidFill>
-              <a:prstDash val="dash"/>
-              <a:miter lim="800000"/>
-            </a:ln>
-          </p:spPr>
-          <p:style>
-            <a:lnRef idx="0">
-              <a:schemeClr val="accent1"/>
-            </a:lnRef>
-            <a:fillRef idx="0">
-              <a:srgbClr val="FFFFFF"/>
-            </a:fillRef>
-            <a:effectRef idx="0">
-              <a:srgbClr val="FFFFFF"/>
-            </a:effectRef>
-            <a:fontRef idx="minor">
+            </a:solidFill>
+            <a:headEnd type="none"/>
+            <a:tailEnd type="triangle" w="med" len="med"/>
+          </a:ln>
+        </p:spPr>
+        <p:style>
+          <a:lnRef idx="2">
+            <a:schemeClr val="accent1"/>
+          </a:lnRef>
+          <a:fillRef idx="0">
+            <a:srgbClr val="FFFFFF"/>
+          </a:fillRef>
+          <a:effectRef idx="0">
+            <a:srgbClr val="FFFFFF"/>
+          </a:effectRef>
+          <a:fontRef idx="minor">
+            <a:schemeClr val="tx1"/>
+          </a:fontRef>
+        </p:style>
+      </p:cxnSp>
+      <p:cxnSp>
+        <p:nvCxnSpPr>
+          <p:cNvPr id="26" name="直接箭头连接符 25"/>
+          <p:cNvCxnSpPr/>
+          <p:nvPr>
+            <p:custDataLst>
+              <p:tags r:id="rId14"/>
+            </p:custDataLst>
+          </p:nvPr>
+        </p:nvCxnSpPr>
+        <p:spPr>
+          <a:xfrm>
+            <a:off x="9114790" y="1973580"/>
+            <a:ext cx="605155" cy="0"/>
+          </a:xfrm>
+          <a:prstGeom prst="straightConnector1">
+            <a:avLst/>
+          </a:prstGeom>
+          <a:ln w="19050">
+            <a:solidFill>
               <a:schemeClr val="tx1"/>
-            </a:fontRef>
-          </p:style>
-          <p:txBody>
-            <a:bodyPr rtlCol="0" anchor="ctr"/>
-            <a:p>
-              <a:pPr algn="ctr"/>
-              <a:endParaRPr lang="zh-CN" altLang="en-US" sz="1810"/>
-            </a:p>
-          </p:txBody>
-        </p:sp>
-        <p:sp>
-          <p:nvSpPr>
-            <p:cNvPr id="38" name="文本框 37"/>
-            <p:cNvSpPr txBox="1"/>
-            <p:nvPr>
-              <p:custDataLst>
-                <p:tags r:id="rId20"/>
-              </p:custDataLst>
-            </p:nvPr>
-          </p:nvSpPr>
-          <p:spPr>
-            <a:xfrm>
-              <a:off x="5307" y="5476"/>
-              <a:ext cx="4270" cy="556"/>
-            </a:xfrm>
-            <a:prstGeom prst="rect">
-              <a:avLst/>
-            </a:prstGeom>
-            <a:noFill/>
-          </p:spPr>
-          <p:txBody>
-            <a:bodyPr wrap="square" rtlCol="0">
-              <a:spAutoFit/>
-            </a:bodyPr>
-            <a:p>
-              <a:r>
-                <a:rPr lang="zh-CN" altLang="en-US" sz="1810" b="1">
-                  <a:solidFill>
-                    <a:schemeClr val="tx1"/>
-                  </a:solidFill>
-                  <a:latin typeface="宋体" panose="02010600030101010101" pitchFamily="2" charset="-122"/>
-                  <a:ea typeface="宋体" panose="02010600030101010101" pitchFamily="2" charset="-122"/>
-                  <a:sym typeface="+mn-ea"/>
-                </a:rPr>
-                <a:t>可编程着色器部分</a:t>
-              </a:r>
-              <a:endParaRPr lang="zh-CN" altLang="en-US" sz="1810" b="1">
+            </a:solidFill>
+            <a:headEnd type="none"/>
+            <a:tailEnd type="triangle" w="med" len="med"/>
+          </a:ln>
+        </p:spPr>
+        <p:style>
+          <a:lnRef idx="2">
+            <a:schemeClr val="accent1"/>
+          </a:lnRef>
+          <a:fillRef idx="0">
+            <a:srgbClr val="FFFFFF"/>
+          </a:fillRef>
+          <a:effectRef idx="0">
+            <a:srgbClr val="FFFFFF"/>
+          </a:effectRef>
+          <a:fontRef idx="minor">
+            <a:schemeClr val="tx1"/>
+          </a:fontRef>
+        </p:style>
+      </p:cxnSp>
+      <p:cxnSp>
+        <p:nvCxnSpPr>
+          <p:cNvPr id="28" name="直接箭头连接符 27"/>
+          <p:cNvCxnSpPr/>
+          <p:nvPr>
+            <p:custDataLst>
+              <p:tags r:id="rId15"/>
+            </p:custDataLst>
+          </p:nvPr>
+        </p:nvCxnSpPr>
+        <p:spPr>
+          <a:xfrm>
+            <a:off x="10518140" y="1973580"/>
+            <a:ext cx="482600" cy="7620"/>
+          </a:xfrm>
+          <a:prstGeom prst="straightConnector1">
+            <a:avLst/>
+          </a:prstGeom>
+          <a:ln w="19050">
+            <a:solidFill>
+              <a:schemeClr val="tx1"/>
+            </a:solidFill>
+            <a:headEnd type="none"/>
+            <a:tailEnd type="triangle" w="med" len="med"/>
+          </a:ln>
+        </p:spPr>
+        <p:style>
+          <a:lnRef idx="2">
+            <a:schemeClr val="accent1"/>
+          </a:lnRef>
+          <a:fillRef idx="0">
+            <a:srgbClr val="FFFFFF"/>
+          </a:fillRef>
+          <a:effectRef idx="0">
+            <a:srgbClr val="FFFFFF"/>
+          </a:effectRef>
+          <a:fontRef idx="minor">
+            <a:schemeClr val="tx1"/>
+          </a:fontRef>
+        </p:style>
+      </p:cxnSp>
+      <p:cxnSp>
+        <p:nvCxnSpPr>
+          <p:cNvPr id="30" name="直接箭头连接符 29"/>
+          <p:cNvCxnSpPr>
+            <a:stCxn id="3" idx="2"/>
+            <a:endCxn id="6" idx="0"/>
+          </p:cNvCxnSpPr>
+          <p:nvPr>
+            <p:custDataLst>
+              <p:tags r:id="rId16"/>
+            </p:custDataLst>
+          </p:nvPr>
+        </p:nvCxnSpPr>
+        <p:spPr>
+          <a:xfrm>
+            <a:off x="920115" y="519430"/>
+            <a:ext cx="0" cy="1225550"/>
+          </a:xfrm>
+          <a:prstGeom prst="straightConnector1">
+            <a:avLst/>
+          </a:prstGeom>
+          <a:ln w="19050">
+            <a:solidFill>
+              <a:schemeClr val="tx1"/>
+            </a:solidFill>
+            <a:headEnd type="none"/>
+            <a:tailEnd type="triangle" w="med" len="med"/>
+          </a:ln>
+        </p:spPr>
+        <p:style>
+          <a:lnRef idx="2">
+            <a:schemeClr val="accent1"/>
+          </a:lnRef>
+          <a:fillRef idx="0">
+            <a:srgbClr val="FFFFFF"/>
+          </a:fillRef>
+          <a:effectRef idx="0">
+            <a:srgbClr val="FFFFFF"/>
+          </a:effectRef>
+          <a:fontRef idx="minor">
+            <a:schemeClr val="tx1"/>
+          </a:fontRef>
+        </p:style>
+      </p:cxnSp>
+      <p:cxnSp>
+        <p:nvCxnSpPr>
+          <p:cNvPr id="34" name="直接箭头连接符 33"/>
+          <p:cNvCxnSpPr/>
+          <p:nvPr>
+            <p:custDataLst>
+              <p:tags r:id="rId17"/>
+            </p:custDataLst>
+          </p:nvPr>
+        </p:nvCxnSpPr>
+        <p:spPr>
+          <a:xfrm>
+            <a:off x="11684635" y="2192655"/>
+            <a:ext cx="0" cy="1225550"/>
+          </a:xfrm>
+          <a:prstGeom prst="straightConnector1">
+            <a:avLst/>
+          </a:prstGeom>
+          <a:ln w="19050">
+            <a:solidFill>
+              <a:schemeClr val="tx1"/>
+            </a:solidFill>
+            <a:headEnd type="none"/>
+            <a:tailEnd type="triangle" w="med" len="med"/>
+          </a:ln>
+        </p:spPr>
+        <p:style>
+          <a:lnRef idx="2">
+            <a:schemeClr val="accent1"/>
+          </a:lnRef>
+          <a:fillRef idx="0">
+            <a:srgbClr val="FFFFFF"/>
+          </a:fillRef>
+          <a:effectRef idx="0">
+            <a:srgbClr val="FFFFFF"/>
+          </a:effectRef>
+          <a:fontRef idx="minor">
+            <a:schemeClr val="tx1"/>
+          </a:fontRef>
+        </p:style>
+      </p:cxnSp>
+      <p:sp>
+        <p:nvSpPr>
+          <p:cNvPr id="37" name="矩形 36"/>
+          <p:cNvSpPr/>
+          <p:nvPr>
+            <p:custDataLst>
+              <p:tags r:id="rId18"/>
+            </p:custDataLst>
+          </p:nvPr>
+        </p:nvSpPr>
+        <p:spPr>
+          <a:xfrm>
+            <a:off x="118110" y="1623060"/>
+            <a:ext cx="7929245" cy="1082040"/>
+          </a:xfrm>
+          <a:prstGeom prst="rect">
+            <a:avLst/>
+          </a:prstGeom>
+          <a:ln w="12700" cap="flat" cmpd="sng" algn="ctr">
+            <a:solidFill>
+              <a:schemeClr val="tx1"/>
+            </a:solidFill>
+            <a:prstDash val="dash"/>
+            <a:miter lim="800000"/>
+          </a:ln>
+        </p:spPr>
+        <p:style>
+          <a:lnRef idx="0">
+            <a:schemeClr val="accent1"/>
+          </a:lnRef>
+          <a:fillRef idx="0">
+            <a:srgbClr val="FFFFFF"/>
+          </a:fillRef>
+          <a:effectRef idx="0">
+            <a:srgbClr val="FFFFFF"/>
+          </a:effectRef>
+          <a:fontRef idx="minor">
+            <a:schemeClr val="tx1"/>
+          </a:fontRef>
+        </p:style>
+        <p:txBody>
+          <a:bodyPr rtlCol="0" anchor="ctr"/>
+          <a:p>
+            <a:pPr algn="ctr"/>
+            <a:endParaRPr lang="zh-CN" altLang="en-US" sz="1810"/>
+          </a:p>
+        </p:txBody>
+      </p:sp>
+      <p:sp>
+        <p:nvSpPr>
+          <p:cNvPr id="38" name="文本框 37"/>
+          <p:cNvSpPr txBox="1"/>
+          <p:nvPr>
+            <p:custDataLst>
+              <p:tags r:id="rId19"/>
+            </p:custDataLst>
+          </p:nvPr>
+        </p:nvSpPr>
+        <p:spPr>
+          <a:xfrm>
+            <a:off x="3198495" y="2366010"/>
+            <a:ext cx="2990850" cy="369570"/>
+          </a:xfrm>
+          <a:prstGeom prst="rect">
+            <a:avLst/>
+          </a:prstGeom>
+          <a:noFill/>
+        </p:spPr>
+        <p:txBody>
+          <a:bodyPr wrap="square" rtlCol="0">
+            <a:spAutoFit/>
+          </a:bodyPr>
+          <a:p>
+            <a:r>
+              <a:rPr lang="zh-CN" altLang="en-US" sz="1810">
                 <a:solidFill>
                   <a:schemeClr val="tx1"/>
                 </a:solidFill>
                 <a:latin typeface="宋体" panose="02010600030101010101" pitchFamily="2" charset="-122"/>
                 <a:ea typeface="宋体" panose="02010600030101010101" pitchFamily="2" charset="-122"/>
                 <a:sym typeface="+mn-ea"/>
-              </a:endParaRPr>
-            </a:p>
-          </p:txBody>
-        </p:sp>
-        <p:sp>
-          <p:nvSpPr>
-            <p:cNvPr id="39" name="矩形 38"/>
-            <p:cNvSpPr/>
-            <p:nvPr>
-              <p:custDataLst>
-                <p:tags r:id="rId21"/>
-              </p:custDataLst>
-            </p:nvPr>
-          </p:nvSpPr>
-          <p:spPr>
-            <a:xfrm>
-              <a:off x="12444" y="4359"/>
-              <a:ext cx="6057" cy="1627"/>
-            </a:xfrm>
-            <a:prstGeom prst="rect">
-              <a:avLst/>
-            </a:prstGeom>
-            <a:ln w="12700" cap="flat" cmpd="sng" algn="ctr">
+              </a:rPr>
+              <a:t>可编程着色器部分</a:t>
+            </a:r>
+            <a:endParaRPr lang="zh-CN" altLang="en-US" sz="1810">
               <a:solidFill>
                 <a:schemeClr val="tx1"/>
               </a:solidFill>
-              <a:prstDash val="dash"/>
-              <a:miter lim="800000"/>
-            </a:ln>
-          </p:spPr>
-          <p:style>
-            <a:lnRef idx="0">
-              <a:schemeClr val="accent1"/>
-            </a:lnRef>
-            <a:fillRef idx="0">
-              <a:srgbClr val="FFFFFF"/>
-            </a:fillRef>
-            <a:effectRef idx="0">
-              <a:srgbClr val="FFFFFF"/>
-            </a:effectRef>
-            <a:fontRef idx="minor">
+              <a:latin typeface="宋体" panose="02010600030101010101" pitchFamily="2" charset="-122"/>
+              <a:ea typeface="宋体" panose="02010600030101010101" pitchFamily="2" charset="-122"/>
+              <a:sym typeface="+mn-ea"/>
+            </a:endParaRPr>
+          </a:p>
+        </p:txBody>
+      </p:sp>
+      <p:sp>
+        <p:nvSpPr>
+          <p:cNvPr id="39" name="矩形 38"/>
+          <p:cNvSpPr/>
+          <p:nvPr>
+            <p:custDataLst>
+              <p:tags r:id="rId20"/>
+            </p:custDataLst>
+          </p:nvPr>
+        </p:nvSpPr>
+        <p:spPr>
+          <a:xfrm>
+            <a:off x="8197215" y="1623060"/>
+            <a:ext cx="4242435" cy="1082040"/>
+          </a:xfrm>
+          <a:prstGeom prst="rect">
+            <a:avLst/>
+          </a:prstGeom>
+          <a:ln w="12700" cap="flat" cmpd="sng" algn="ctr">
+            <a:solidFill>
               <a:schemeClr val="tx1"/>
-            </a:fontRef>
-          </p:style>
-          <p:txBody>
-            <a:bodyPr rtlCol="0" anchor="ctr"/>
-            <a:p>
-              <a:pPr algn="ctr"/>
-              <a:endParaRPr lang="zh-CN" altLang="en-US" sz="1810"/>
-            </a:p>
-          </p:txBody>
-        </p:sp>
-        <p:sp>
-          <p:nvSpPr>
-            <p:cNvPr id="40" name="文本框 39"/>
-            <p:cNvSpPr txBox="1"/>
-            <p:nvPr>
-              <p:custDataLst>
-                <p:tags r:id="rId22"/>
-              </p:custDataLst>
-            </p:nvPr>
-          </p:nvSpPr>
-          <p:spPr>
-            <a:xfrm>
-              <a:off x="14259" y="5476"/>
-              <a:ext cx="4270" cy="556"/>
-            </a:xfrm>
-            <a:prstGeom prst="rect">
-              <a:avLst/>
-            </a:prstGeom>
-            <a:noFill/>
-          </p:spPr>
-          <p:txBody>
-            <a:bodyPr wrap="square" rtlCol="0">
-              <a:spAutoFit/>
-            </a:bodyPr>
-            <a:p>
-              <a:r>
-                <a:rPr lang="zh-CN" altLang="en-US" sz="1810" b="1">
-                  <a:solidFill>
-                    <a:schemeClr val="tx1"/>
-                  </a:solidFill>
-                  <a:latin typeface="宋体" panose="02010600030101010101" pitchFamily="2" charset="-122"/>
-                  <a:ea typeface="宋体" panose="02010600030101010101" pitchFamily="2" charset="-122"/>
-                  <a:sym typeface="+mn-ea"/>
-                </a:rPr>
-                <a:t>不可编程着色器部分</a:t>
-              </a:r>
-              <a:endParaRPr lang="zh-CN" altLang="en-US" sz="1810" b="1">
+            </a:solidFill>
+            <a:prstDash val="dash"/>
+            <a:miter lim="800000"/>
+          </a:ln>
+        </p:spPr>
+        <p:style>
+          <a:lnRef idx="0">
+            <a:schemeClr val="accent1"/>
+          </a:lnRef>
+          <a:fillRef idx="0">
+            <a:srgbClr val="FFFFFF"/>
+          </a:fillRef>
+          <a:effectRef idx="0">
+            <a:srgbClr val="FFFFFF"/>
+          </a:effectRef>
+          <a:fontRef idx="minor">
+            <a:schemeClr val="tx1"/>
+          </a:fontRef>
+        </p:style>
+        <p:txBody>
+          <a:bodyPr rtlCol="0" anchor="ctr"/>
+          <a:p>
+            <a:pPr algn="ctr"/>
+            <a:endParaRPr lang="zh-CN" altLang="en-US" sz="1810"/>
+          </a:p>
+        </p:txBody>
+      </p:sp>
+      <p:sp>
+        <p:nvSpPr>
+          <p:cNvPr id="40" name="文本框 39"/>
+          <p:cNvSpPr txBox="1"/>
+          <p:nvPr>
+            <p:custDataLst>
+              <p:tags r:id="rId21"/>
+            </p:custDataLst>
+          </p:nvPr>
+        </p:nvSpPr>
+        <p:spPr>
+          <a:xfrm>
+            <a:off x="9468485" y="2366010"/>
+            <a:ext cx="2990850" cy="369570"/>
+          </a:xfrm>
+          <a:prstGeom prst="rect">
+            <a:avLst/>
+          </a:prstGeom>
+          <a:noFill/>
+        </p:spPr>
+        <p:txBody>
+          <a:bodyPr wrap="square" rtlCol="0">
+            <a:spAutoFit/>
+          </a:bodyPr>
+          <a:p>
+            <a:r>
+              <a:rPr lang="zh-CN" altLang="en-US" sz="1810">
                 <a:solidFill>
                   <a:schemeClr val="tx1"/>
                 </a:solidFill>
                 <a:latin typeface="宋体" panose="02010600030101010101" pitchFamily="2" charset="-122"/>
                 <a:ea typeface="宋体" panose="02010600030101010101" pitchFamily="2" charset="-122"/>
                 <a:sym typeface="+mn-ea"/>
-              </a:endParaRPr>
-            </a:p>
-          </p:txBody>
-        </p:sp>
-        <p:cxnSp>
-          <p:nvCxnSpPr>
-            <p:cNvPr id="41" name="直接箭头连接符 40"/>
-            <p:cNvCxnSpPr/>
-            <p:nvPr>
-              <p:custDataLst>
-                <p:tags r:id="rId23"/>
-              </p:custDataLst>
-            </p:nvPr>
-          </p:nvCxnSpPr>
-          <p:spPr>
-            <a:xfrm flipV="1">
-              <a:off x="5563" y="4877"/>
-              <a:ext cx="438" cy="9"/>
-            </a:xfrm>
-            <a:prstGeom prst="straightConnector1">
-              <a:avLst/>
-            </a:prstGeom>
-            <a:ln w="19050">
+              </a:rPr>
+              <a:t>不可编程着色器部分</a:t>
+            </a:r>
+            <a:endParaRPr lang="zh-CN" altLang="en-US" sz="1810">
               <a:solidFill>
                 <a:schemeClr val="tx1"/>
               </a:solidFill>
-              <a:headEnd type="none"/>
-              <a:tailEnd type="triangle" w="med" len="med"/>
-            </a:ln>
-          </p:spPr>
-          <p:style>
-            <a:lnRef idx="2">
-              <a:schemeClr val="accent1"/>
-            </a:lnRef>
-            <a:fillRef idx="0">
-              <a:srgbClr val="FFFFFF"/>
-            </a:fillRef>
-            <a:effectRef idx="0">
-              <a:srgbClr val="FFFFFF"/>
-            </a:effectRef>
-            <a:fontRef idx="minor">
+              <a:latin typeface="宋体" panose="02010600030101010101" pitchFamily="2" charset="-122"/>
+              <a:ea typeface="宋体" panose="02010600030101010101" pitchFamily="2" charset="-122"/>
+              <a:sym typeface="+mn-ea"/>
+            </a:endParaRPr>
+          </a:p>
+        </p:txBody>
+      </p:sp>
+      <p:cxnSp>
+        <p:nvCxnSpPr>
+          <p:cNvPr id="41" name="直接箭头连接符 40"/>
+          <p:cNvCxnSpPr/>
+          <p:nvPr>
+            <p:custDataLst>
+              <p:tags r:id="rId22"/>
+            </p:custDataLst>
+          </p:nvPr>
+        </p:nvCxnSpPr>
+        <p:spPr>
+          <a:xfrm flipV="1">
+            <a:off x="3377565" y="1967230"/>
+            <a:ext cx="306705" cy="5715"/>
+          </a:xfrm>
+          <a:prstGeom prst="straightConnector1">
+            <a:avLst/>
+          </a:prstGeom>
+          <a:ln w="19050">
+            <a:solidFill>
               <a:schemeClr val="tx1"/>
-            </a:fontRef>
-          </p:style>
-        </p:cxnSp>
-        <p:cxnSp>
-          <p:nvCxnSpPr>
-            <p:cNvPr id="45" name="直接箭头连接符 44"/>
-            <p:cNvCxnSpPr/>
-            <p:nvPr>
-              <p:custDataLst>
-                <p:tags r:id="rId24"/>
-              </p:custDataLst>
-            </p:nvPr>
-          </p:nvCxnSpPr>
-          <p:spPr>
-            <a:xfrm flipV="1">
-              <a:off x="7143" y="4877"/>
-              <a:ext cx="438" cy="9"/>
-            </a:xfrm>
-            <a:prstGeom prst="straightConnector1">
-              <a:avLst/>
-            </a:prstGeom>
-            <a:ln w="19050">
-              <a:solidFill>
-                <a:schemeClr val="tx1"/>
-              </a:solidFill>
-              <a:headEnd type="none"/>
-              <a:tailEnd type="triangle" w="med" len="med"/>
-            </a:ln>
-          </p:spPr>
-          <p:style>
-            <a:lnRef idx="2">
-              <a:schemeClr val="accent1"/>
-            </a:lnRef>
-            <a:fillRef idx="0">
-              <a:srgbClr val="FFFFFF"/>
-            </a:fillRef>
-            <a:effectRef idx="0">
-              <a:srgbClr val="FFFFFF"/>
-            </a:effectRef>
-            <a:fontRef idx="minor">
+            </a:solidFill>
+            <a:headEnd type="none"/>
+            <a:tailEnd type="triangle" w="med" len="med"/>
+          </a:ln>
+        </p:spPr>
+        <p:style>
+          <a:lnRef idx="2">
+            <a:schemeClr val="accent1"/>
+          </a:lnRef>
+          <a:fillRef idx="0">
+            <a:srgbClr val="FFFFFF"/>
+          </a:fillRef>
+          <a:effectRef idx="0">
+            <a:srgbClr val="FFFFFF"/>
+          </a:effectRef>
+          <a:fontRef idx="minor">
+            <a:schemeClr val="tx1"/>
+          </a:fontRef>
+        </p:style>
+      </p:cxnSp>
+      <p:cxnSp>
+        <p:nvCxnSpPr>
+          <p:cNvPr id="45" name="直接箭头连接符 44"/>
+          <p:cNvCxnSpPr/>
+          <p:nvPr>
+            <p:custDataLst>
+              <p:tags r:id="rId23"/>
+            </p:custDataLst>
+          </p:nvPr>
+        </p:nvCxnSpPr>
+        <p:spPr>
+          <a:xfrm flipV="1">
+            <a:off x="4484370" y="1967230"/>
+            <a:ext cx="306705" cy="5715"/>
+          </a:xfrm>
+          <a:prstGeom prst="straightConnector1">
+            <a:avLst/>
+          </a:prstGeom>
+          <a:ln w="19050">
+            <a:solidFill>
               <a:schemeClr val="tx1"/>
-            </a:fontRef>
-          </p:style>
-        </p:cxnSp>
-      </p:grpSp>
+            </a:solidFill>
+            <a:headEnd type="none"/>
+            <a:tailEnd type="triangle" w="med" len="med"/>
+          </a:ln>
+        </p:spPr>
+        <p:style>
+          <a:lnRef idx="2">
+            <a:schemeClr val="accent1"/>
+          </a:lnRef>
+          <a:fillRef idx="0">
+            <a:srgbClr val="FFFFFF"/>
+          </a:fillRef>
+          <a:effectRef idx="0">
+            <a:srgbClr val="FFFFFF"/>
+          </a:effectRef>
+          <a:fontRef idx="minor">
+            <a:schemeClr val="tx1"/>
+          </a:fontRef>
+        </p:style>
+      </p:cxnSp>
     </p:spTree>
   </p:cSld>
   <p:clrMapOvr>
@@ -4232,145 +4213,139 @@
 
 <file path=ppt/tags/tag1.xml><?xml version="1.0" encoding="utf-8"?>
 <p:tagLst xmlns:p="http://schemas.openxmlformats.org/presentationml/2006/main">
-  <p:tag name="KSO_WM_DIAGRAM_VIRTUALLY_FRAME" val="{&quot;height&quot;:287.05,&quot;left&quot;:39.05,&quot;top&quot;:100.4,&quot;width&quot;:894.8}"/>
+  <p:tag name="KSO_WM_DIAGRAM_VIRTUALLY_FRAME" val="{&quot;height&quot;:382.8,&quot;left&quot;:2.25,&quot;top&quot;:4.65,&quot;width&quot;:986.95}"/>
 </p:tagLst>
 </file>
 
 <file path=ppt/tags/tag10.xml><?xml version="1.0" encoding="utf-8"?>
 <p:tagLst xmlns:p="http://schemas.openxmlformats.org/presentationml/2006/main">
-  <p:tag name="KSO_WM_DIAGRAM_VIRTUALLY_FRAME" val="{&quot;height&quot;:287.05,&quot;left&quot;:39.05,&quot;top&quot;:100.4,&quot;width&quot;:894.8}"/>
+  <p:tag name="KSO_WM_DIAGRAM_VIRTUALLY_FRAME" val="{&quot;height&quot;:382.8,&quot;left&quot;:2.25,&quot;top&quot;:4.65,&quot;width&quot;:986.95}"/>
 </p:tagLst>
 </file>
 
 <file path=ppt/tags/tag11.xml><?xml version="1.0" encoding="utf-8"?>
 <p:tagLst xmlns:p="http://schemas.openxmlformats.org/presentationml/2006/main">
-  <p:tag name="KSO_WM_DIAGRAM_VIRTUALLY_FRAME" val="{&quot;height&quot;:287.05,&quot;left&quot;:39.05,&quot;top&quot;:100.4,&quot;width&quot;:894.8}"/>
+  <p:tag name="KSO_WM_DIAGRAM_VIRTUALLY_FRAME" val="{&quot;height&quot;:382.8,&quot;left&quot;:2.25,&quot;top&quot;:4.65,&quot;width&quot;:986.95}"/>
 </p:tagLst>
 </file>
 
 <file path=ppt/tags/tag12.xml><?xml version="1.0" encoding="utf-8"?>
 <p:tagLst xmlns:p="http://schemas.openxmlformats.org/presentationml/2006/main">
-  <p:tag name="KSO_WM_DIAGRAM_VIRTUALLY_FRAME" val="{&quot;height&quot;:287.05,&quot;left&quot;:39.05,&quot;top&quot;:100.4,&quot;width&quot;:894.8}"/>
+  <p:tag name="KSO_WM_DIAGRAM_VIRTUALLY_FRAME" val="{&quot;height&quot;:382.8,&quot;left&quot;:2.25,&quot;top&quot;:4.65,&quot;width&quot;:986.95}"/>
 </p:tagLst>
 </file>
 
 <file path=ppt/tags/tag13.xml><?xml version="1.0" encoding="utf-8"?>
 <p:tagLst xmlns:p="http://schemas.openxmlformats.org/presentationml/2006/main">
-  <p:tag name="KSO_WM_DIAGRAM_VIRTUALLY_FRAME" val="{&quot;height&quot;:287.05,&quot;left&quot;:39.05,&quot;top&quot;:100.4,&quot;width&quot;:894.8}"/>
+  <p:tag name="KSO_WM_DIAGRAM_VIRTUALLY_FRAME" val="{&quot;height&quot;:382.8,&quot;left&quot;:2.25,&quot;top&quot;:4.65,&quot;width&quot;:986.95}"/>
 </p:tagLst>
 </file>
 
 <file path=ppt/tags/tag14.xml><?xml version="1.0" encoding="utf-8"?>
 <p:tagLst xmlns:p="http://schemas.openxmlformats.org/presentationml/2006/main">
-  <p:tag name="KSO_WM_DIAGRAM_VIRTUALLY_FRAME" val="{&quot;height&quot;:287.05,&quot;left&quot;:39.05,&quot;top&quot;:100.4,&quot;width&quot;:894.8}"/>
+  <p:tag name="KSO_WM_DIAGRAM_VIRTUALLY_FRAME" val="{&quot;height&quot;:382.8,&quot;left&quot;:2.25,&quot;top&quot;:4.65,&quot;width&quot;:986.95}"/>
 </p:tagLst>
 </file>
 
 <file path=ppt/tags/tag15.xml><?xml version="1.0" encoding="utf-8"?>
 <p:tagLst xmlns:p="http://schemas.openxmlformats.org/presentationml/2006/main">
-  <p:tag name="KSO_WM_DIAGRAM_VIRTUALLY_FRAME" val="{&quot;height&quot;:287.05,&quot;left&quot;:39.05,&quot;top&quot;:100.4,&quot;width&quot;:894.8}"/>
+  <p:tag name="KSO_WM_DIAGRAM_VIRTUALLY_FRAME" val="{&quot;height&quot;:382.8,&quot;left&quot;:2.25,&quot;top&quot;:4.65,&quot;width&quot;:986.95}"/>
 </p:tagLst>
 </file>
 
 <file path=ppt/tags/tag16.xml><?xml version="1.0" encoding="utf-8"?>
 <p:tagLst xmlns:p="http://schemas.openxmlformats.org/presentationml/2006/main">
-  <p:tag name="KSO_WM_DIAGRAM_VIRTUALLY_FRAME" val="{&quot;height&quot;:287.05,&quot;left&quot;:39.05,&quot;top&quot;:100.4,&quot;width&quot;:894.8}"/>
+  <p:tag name="KSO_WM_DIAGRAM_VIRTUALLY_FRAME" val="{&quot;height&quot;:382.8,&quot;left&quot;:2.25,&quot;top&quot;:4.65,&quot;width&quot;:986.95}"/>
 </p:tagLst>
 </file>
 
 <file path=ppt/tags/tag17.xml><?xml version="1.0" encoding="utf-8"?>
 <p:tagLst xmlns:p="http://schemas.openxmlformats.org/presentationml/2006/main">
-  <p:tag name="KSO_WM_DIAGRAM_VIRTUALLY_FRAME" val="{&quot;height&quot;:287.05,&quot;left&quot;:39.05,&quot;top&quot;:100.4,&quot;width&quot;:894.8}"/>
+  <p:tag name="KSO_WM_DIAGRAM_VIRTUALLY_FRAME" val="{&quot;height&quot;:382.8,&quot;left&quot;:2.25,&quot;top&quot;:4.65,&quot;width&quot;:986.95}"/>
 </p:tagLst>
 </file>
 
 <file path=ppt/tags/tag18.xml><?xml version="1.0" encoding="utf-8"?>
 <p:tagLst xmlns:p="http://schemas.openxmlformats.org/presentationml/2006/main">
-  <p:tag name="KSO_WM_DIAGRAM_VIRTUALLY_FRAME" val="{&quot;height&quot;:287.05,&quot;left&quot;:39.05,&quot;top&quot;:100.4,&quot;width&quot;:894.8}"/>
+  <p:tag name="KSO_WM_DIAGRAM_VIRTUALLY_FRAME" val="{&quot;height&quot;:382.8,&quot;left&quot;:2.25,&quot;top&quot;:4.65,&quot;width&quot;:986.95}"/>
 </p:tagLst>
 </file>
 
 <file path=ppt/tags/tag19.xml><?xml version="1.0" encoding="utf-8"?>
 <p:tagLst xmlns:p="http://schemas.openxmlformats.org/presentationml/2006/main">
-  <p:tag name="KSO_WM_DIAGRAM_VIRTUALLY_FRAME" val="{&quot;height&quot;:287.05,&quot;left&quot;:39.05,&quot;top&quot;:100.4,&quot;width&quot;:894.8}"/>
+  <p:tag name="KSO_WM_DIAGRAM_VIRTUALLY_FRAME" val="{&quot;height&quot;:382.8,&quot;left&quot;:2.25,&quot;top&quot;:4.65,&quot;width&quot;:986.95}"/>
 </p:tagLst>
 </file>
 
 <file path=ppt/tags/tag2.xml><?xml version="1.0" encoding="utf-8"?>
 <p:tagLst xmlns:p="http://schemas.openxmlformats.org/presentationml/2006/main">
-  <p:tag name="KSO_WM_DIAGRAM_VIRTUALLY_FRAME" val="{&quot;height&quot;:287.05,&quot;left&quot;:39.05,&quot;top&quot;:100.4,&quot;width&quot;:894.8}"/>
+  <p:tag name="KSO_WM_DIAGRAM_VIRTUALLY_FRAME" val="{&quot;height&quot;:382.8,&quot;left&quot;:2.25,&quot;top&quot;:4.65,&quot;width&quot;:986.95}"/>
 </p:tagLst>
 </file>
 
 <file path=ppt/tags/tag20.xml><?xml version="1.0" encoding="utf-8"?>
 <p:tagLst xmlns:p="http://schemas.openxmlformats.org/presentationml/2006/main">
-  <p:tag name="KSO_WM_DIAGRAM_VIRTUALLY_FRAME" val="{&quot;height&quot;:287.05,&quot;left&quot;:39.05,&quot;top&quot;:100.4,&quot;width&quot;:894.8}"/>
+  <p:tag name="KSO_WM_DIAGRAM_VIRTUALLY_FRAME" val="{&quot;height&quot;:382.8,&quot;left&quot;:2.25,&quot;top&quot;:4.65,&quot;width&quot;:986.95}"/>
 </p:tagLst>
 </file>
 
 <file path=ppt/tags/tag21.xml><?xml version="1.0" encoding="utf-8"?>
 <p:tagLst xmlns:p="http://schemas.openxmlformats.org/presentationml/2006/main">
-  <p:tag name="KSO_WM_DIAGRAM_VIRTUALLY_FRAME" val="{&quot;height&quot;:287.05,&quot;left&quot;:39.05,&quot;top&quot;:100.4,&quot;width&quot;:894.8}"/>
+  <p:tag name="KSO_WM_DIAGRAM_VIRTUALLY_FRAME" val="{&quot;height&quot;:382.8,&quot;left&quot;:2.25,&quot;top&quot;:4.65,&quot;width&quot;:986.95}"/>
 </p:tagLst>
 </file>
 
 <file path=ppt/tags/tag22.xml><?xml version="1.0" encoding="utf-8"?>
 <p:tagLst xmlns:p="http://schemas.openxmlformats.org/presentationml/2006/main">
-  <p:tag name="KSO_WM_DIAGRAM_VIRTUALLY_FRAME" val="{&quot;height&quot;:287.05,&quot;left&quot;:39.05,&quot;top&quot;:100.4,&quot;width&quot;:894.8}"/>
+  <p:tag name="KSO_WM_DIAGRAM_VIRTUALLY_FRAME" val="{&quot;height&quot;:382.8,&quot;left&quot;:2.25,&quot;top&quot;:4.65,&quot;width&quot;:986.95}"/>
 </p:tagLst>
 </file>
 
 <file path=ppt/tags/tag23.xml><?xml version="1.0" encoding="utf-8"?>
 <p:tagLst xmlns:p="http://schemas.openxmlformats.org/presentationml/2006/main">
-  <p:tag name="KSO_WM_DIAGRAM_VIRTUALLY_FRAME" val="{&quot;height&quot;:287.05,&quot;left&quot;:39.05,&quot;top&quot;:100.4,&quot;width&quot;:894.8}"/>
-</p:tagLst>
-</file>
-
-<file path=ppt/tags/tag24.xml><?xml version="1.0" encoding="utf-8"?>
-<p:tagLst xmlns:p="http://schemas.openxmlformats.org/presentationml/2006/main">
-  <p:tag name="KSO_WM_DIAGRAM_VIRTUALLY_FRAME" val="{&quot;height&quot;:287.05,&quot;left&quot;:39.05,&quot;top&quot;:100.4,&quot;width&quot;:894.8}"/>
+  <p:tag name="KSO_WM_DIAGRAM_VIRTUALLY_FRAME" val="{&quot;height&quot;:382.8,&quot;left&quot;:2.25,&quot;top&quot;:4.65,&quot;width&quot;:986.95}"/>
 </p:tagLst>
 </file>
 
 <file path=ppt/tags/tag3.xml><?xml version="1.0" encoding="utf-8"?>
 <p:tagLst xmlns:p="http://schemas.openxmlformats.org/presentationml/2006/main">
-  <p:tag name="KSO_WM_DIAGRAM_VIRTUALLY_FRAME" val="{&quot;height&quot;:287.05,&quot;left&quot;:39.05,&quot;top&quot;:100.4,&quot;width&quot;:894.8}"/>
+  <p:tag name="KSO_WM_DIAGRAM_VIRTUALLY_FRAME" val="{&quot;height&quot;:382.8,&quot;left&quot;:2.25,&quot;top&quot;:4.65,&quot;width&quot;:986.95}"/>
 </p:tagLst>
 </file>
 
 <file path=ppt/tags/tag4.xml><?xml version="1.0" encoding="utf-8"?>
 <p:tagLst xmlns:p="http://schemas.openxmlformats.org/presentationml/2006/main">
-  <p:tag name="KSO_WM_DIAGRAM_VIRTUALLY_FRAME" val="{&quot;height&quot;:287.05,&quot;left&quot;:39.05,&quot;top&quot;:100.4,&quot;width&quot;:894.8}"/>
+  <p:tag name="KSO_WM_DIAGRAM_VIRTUALLY_FRAME" val="{&quot;height&quot;:382.8,&quot;left&quot;:2.25,&quot;top&quot;:4.65,&quot;width&quot;:986.95}"/>
 </p:tagLst>
 </file>
 
 <file path=ppt/tags/tag5.xml><?xml version="1.0" encoding="utf-8"?>
 <p:tagLst xmlns:p="http://schemas.openxmlformats.org/presentationml/2006/main">
-  <p:tag name="KSO_WM_DIAGRAM_VIRTUALLY_FRAME" val="{&quot;height&quot;:287.05,&quot;left&quot;:39.05,&quot;top&quot;:100.4,&quot;width&quot;:894.8}"/>
+  <p:tag name="KSO_WM_DIAGRAM_VIRTUALLY_FRAME" val="{&quot;height&quot;:382.8,&quot;left&quot;:2.25,&quot;top&quot;:4.65,&quot;width&quot;:986.95}"/>
 </p:tagLst>
 </file>
 
 <file path=ppt/tags/tag6.xml><?xml version="1.0" encoding="utf-8"?>
 <p:tagLst xmlns:p="http://schemas.openxmlformats.org/presentationml/2006/main">
-  <p:tag name="KSO_WM_DIAGRAM_VIRTUALLY_FRAME" val="{&quot;height&quot;:287.05,&quot;left&quot;:39.05,&quot;top&quot;:100.4,&quot;width&quot;:894.8}"/>
+  <p:tag name="KSO_WM_DIAGRAM_VIRTUALLY_FRAME" val="{&quot;height&quot;:382.8,&quot;left&quot;:2.25,&quot;top&quot;:4.65,&quot;width&quot;:986.95}"/>
 </p:tagLst>
 </file>
 
 <file path=ppt/tags/tag7.xml><?xml version="1.0" encoding="utf-8"?>
 <p:tagLst xmlns:p="http://schemas.openxmlformats.org/presentationml/2006/main">
-  <p:tag name="KSO_WM_DIAGRAM_VIRTUALLY_FRAME" val="{&quot;height&quot;:287.05,&quot;left&quot;:39.05,&quot;top&quot;:100.4,&quot;width&quot;:894.8}"/>
+  <p:tag name="KSO_WM_DIAGRAM_VIRTUALLY_FRAME" val="{&quot;height&quot;:382.8,&quot;left&quot;:2.25,&quot;top&quot;:4.65,&quot;width&quot;:986.95}"/>
 </p:tagLst>
 </file>
 
 <file path=ppt/tags/tag8.xml><?xml version="1.0" encoding="utf-8"?>
 <p:tagLst xmlns:p="http://schemas.openxmlformats.org/presentationml/2006/main">
-  <p:tag name="KSO_WM_DIAGRAM_VIRTUALLY_FRAME" val="{&quot;height&quot;:287.05,&quot;left&quot;:39.05,&quot;top&quot;:100.4,&quot;width&quot;:894.8}"/>
+  <p:tag name="KSO_WM_DIAGRAM_VIRTUALLY_FRAME" val="{&quot;height&quot;:382.8,&quot;left&quot;:2.25,&quot;top&quot;:4.65,&quot;width&quot;:986.95}"/>
 </p:tagLst>
 </file>
 
 <file path=ppt/tags/tag9.xml><?xml version="1.0" encoding="utf-8"?>
 <p:tagLst xmlns:p="http://schemas.openxmlformats.org/presentationml/2006/main">
-  <p:tag name="KSO_WM_DIAGRAM_VIRTUALLY_FRAME" val="{&quot;height&quot;:287.05,&quot;left&quot;:39.05,&quot;top&quot;:100.4,&quot;width&quot;:894.8}"/>
+  <p:tag name="KSO_WM_DIAGRAM_VIRTUALLY_FRAME" val="{&quot;height&quot;:382.8,&quot;left&quot;:2.25,&quot;top&quot;:4.65,&quot;width&quot;:986.95}"/>
 </p:tagLst>
 </file>
 
